--- a/docs/CCHC-Thiet-ke-UIUX-Presentation.pptx
+++ b/docs/CCHC-Thiet-ke-UIUX-Presentation.pptx
@@ -4,9 +4,6 @@
   <p:sldMasterIdLst>
     <p:sldMasterId id="2147483648" r:id="rId1"/>
   </p:sldMasterIdLst>
-  <p:notesMasterIdLst>
-    <p:notesMasterId r:id="rId13"/>
-  </p:notesMasterIdLst>
   <p:sldIdLst>
     <p:sldId id="256" r:id="rId2"/>
     <p:sldId id="257" r:id="rId3"/>
@@ -20,6 +17,9 @@
     <p:sldId id="265" r:id="rId11"/>
     <p:sldId id="266" r:id="rId12"/>
   </p:sldIdLst>
+  <p:notesMasterIdLst>
+    <p:notesMasterId r:id="rId13"/>
+  </p:notesMasterIdLst>
   <p:sldSz cx="12192000" cy="6858000"/>
   <p:notesSz cx="6858000" cy="12192000"/>
   <p:defaultTextStyle>
@@ -114,11 +114,6 @@
       </a:defRPr>
     </a:lvl9pPr>
   </p:defaultTextStyle>
-  <p:extLst>
-    <p:ext uri="{EFAFB233-063F-42B5-8137-9DF3F51BA10A}">
-      <p15:sldGuideLst xmlns:p15="http://schemas.microsoft.com/office/powerpoint/2012/main"/>
-    </p:ext>
-  </p:extLst>
 </p:presentation>
 </file>
 
@@ -144,10 +139,234 @@
           <a:chExt cx="0" cy="0"/>
         </a:xfrm>
       </p:grpSpPr>
+      <p:sp>
+        <p:nvSpPr>
+          <p:cNvPr id="2" name="Header Placeholder 1"/>
+          <p:cNvSpPr>
+            <a:spLocks noGrp="1"/>
+          </p:cNvSpPr>
+          <p:nvPr>
+            <p:ph type="hdr" sz="quarter"/>
+          </p:nvPr>
+        </p:nvSpPr>
+        <p:spPr>
+          <a:xfrm>
+            <a:off x="0" y="0"/>
+            <a:ext cx="2971800" cy="458788"/>
+          </a:xfrm>
+          <a:prstGeom prst="rect">
+            <a:avLst/>
+          </a:prstGeom>
+        </p:spPr>
+        <p:txBody>
+          <a:bodyPr vert="horz" lIns="91440" tIns="45720" rIns="91440" bIns="45720" rtlCol="0"/>
+          <a:lstStyle>
+            <a:lvl1pPr algn="l">
+              <a:defRPr sz="1200"/>
+            </a:lvl1pPr>
+          </a:lstStyle>
+          <a:p>
+            <a:endParaRPr lang="en-US"/>
+          </a:p>
+        </p:txBody>
+      </p:sp>
+      <p:sp>
+        <p:nvSpPr>
+          <p:cNvPr id="3" name="Date Placeholder 2"/>
+          <p:cNvSpPr>
+            <a:spLocks noGrp="1"/>
+          </p:cNvSpPr>
+          <p:nvPr>
+            <p:ph type="dt" idx="1"/>
+          </p:nvPr>
+        </p:nvSpPr>
+        <p:spPr>
+          <a:xfrm>
+            <a:off x="3884613" y="0"/>
+            <a:ext cx="2971800" cy="458788"/>
+          </a:xfrm>
+          <a:prstGeom prst="rect">
+            <a:avLst/>
+          </a:prstGeom>
+        </p:spPr>
+        <p:txBody>
+          <a:bodyPr vert="horz" lIns="91440" tIns="45720" rIns="91440" bIns="45720" rtlCol="0"/>
+          <a:lstStyle>
+            <a:lvl1pPr algn="r">
+              <a:defRPr sz="1200"/>
+            </a:lvl1pPr>
+          </a:lstStyle>
+          <a:p>
+            <a:fld id="{5282F153-3F37-0F45-9E97-73ACFA13230C}" type="datetimeFigureOut">
+              <a:rPr lang="en-US"/>
+              <a:t>7/23/19</a:t>
+            </a:fld>
+            <a:endParaRPr lang="en-US"/>
+          </a:p>
+        </p:txBody>
+      </p:sp>
+      <p:sp>
+        <p:nvSpPr>
+          <p:cNvPr id="4" name="Slide Image Placeholder 3"/>
+          <p:cNvSpPr>
+            <a:spLocks noGrp="1" noRot="1" noChangeAspect="1"/>
+          </p:cNvSpPr>
+          <p:nvPr>
+            <p:ph type="sldImg" idx="2"/>
+          </p:nvPr>
+        </p:nvSpPr>
+        <p:spPr>
+          <a:xfrm>
+            <a:off x="685800" y="1143000"/>
+            <a:ext cx="5486400" cy="3086100"/>
+          </a:xfrm>
+          <a:prstGeom prst="rect">
+            <a:avLst/>
+          </a:prstGeom>
+          <a:noFill/>
+          <a:ln w="12700">
+            <a:solidFill>
+              <a:prstClr val="black"/>
+            </a:solidFill>
+          </a:ln>
+        </p:spPr>
+        <p:txBody>
+          <a:bodyPr vert="horz" lIns="91440" tIns="45720" rIns="91440" bIns="45720" rtlCol="0" anchor="ctr"/>
+          <a:lstStyle/>
+          <a:p>
+            <a:endParaRPr lang="en-US"/>
+          </a:p>
+        </p:txBody>
+      </p:sp>
+      <p:sp>
+        <p:nvSpPr>
+          <p:cNvPr id="5" name="Notes Placeholder 4"/>
+          <p:cNvSpPr>
+            <a:spLocks noGrp="1"/>
+          </p:cNvSpPr>
+          <p:nvPr>
+            <p:ph type="body" sz="quarter" idx="3"/>
+          </p:nvPr>
+        </p:nvSpPr>
+        <p:spPr>
+          <a:xfrm>
+            <a:off x="685800" y="4400550"/>
+            <a:ext cx="5486400" cy="3600450"/>
+          </a:xfrm>
+          <a:prstGeom prst="rect">
+            <a:avLst/>
+          </a:prstGeom>
+        </p:spPr>
+        <p:txBody>
+          <a:bodyPr vert="horz" lIns="91440" tIns="45720" rIns="91440" bIns="45720" rtlCol="0"/>
+          <a:lstStyle/>
+          <a:p>
+            <a:pPr lvl="0"/>
+            <a:r>
+              <a:rPr lang="en-US"/>
+              <a:t>Click to edit Master text styles</a:t>
+            </a:r>
+          </a:p>
+          <a:p>
+            <a:pPr lvl="1"/>
+            <a:r>
+              <a:rPr lang="en-US"/>
+              <a:t>Second level</a:t>
+            </a:r>
+          </a:p>
+          <a:p>
+            <a:pPr lvl="2"/>
+            <a:r>
+              <a:rPr lang="en-US"/>
+              <a:t>Third level</a:t>
+            </a:r>
+          </a:p>
+          <a:p>
+            <a:pPr lvl="3"/>
+            <a:r>
+              <a:rPr lang="en-US"/>
+              <a:t>Fourth level</a:t>
+            </a:r>
+          </a:p>
+          <a:p>
+            <a:pPr lvl="4"/>
+            <a:r>
+              <a:rPr lang="en-US"/>
+              <a:t>Fifth level</a:t>
+            </a:r>
+          </a:p>
+        </p:txBody>
+      </p:sp>
+      <p:sp>
+        <p:nvSpPr>
+          <p:cNvPr id="6" name="Footer Placeholder 5"/>
+          <p:cNvSpPr>
+            <a:spLocks noGrp="1"/>
+          </p:cNvSpPr>
+          <p:nvPr>
+            <p:ph type="ftr" sz="quarter" idx="4"/>
+          </p:nvPr>
+        </p:nvSpPr>
+        <p:spPr>
+          <a:xfrm>
+            <a:off x="0" y="8685213"/>
+            <a:ext cx="2971800" cy="458787"/>
+          </a:xfrm>
+          <a:prstGeom prst="rect">
+            <a:avLst/>
+          </a:prstGeom>
+        </p:spPr>
+        <p:txBody>
+          <a:bodyPr vert="horz" lIns="91440" tIns="45720" rIns="91440" bIns="45720" rtlCol="0" anchor="b"/>
+          <a:lstStyle>
+            <a:lvl1pPr algn="l">
+              <a:defRPr sz="1200"/>
+            </a:lvl1pPr>
+          </a:lstStyle>
+          <a:p>
+            <a:endParaRPr lang="en-US"/>
+          </a:p>
+        </p:txBody>
+      </p:sp>
+      <p:sp>
+        <p:nvSpPr>
+          <p:cNvPr id="7" name="Slide Number Placeholder 6"/>
+          <p:cNvSpPr>
+            <a:spLocks noGrp="1"/>
+          </p:cNvSpPr>
+          <p:nvPr>
+            <p:ph type="sldNum" sz="quarter" idx="5"/>
+          </p:nvPr>
+        </p:nvSpPr>
+        <p:spPr>
+          <a:xfrm>
+            <a:off x="3884613" y="8685213"/>
+            <a:ext cx="2971800" cy="458787"/>
+          </a:xfrm>
+          <a:prstGeom prst="rect">
+            <a:avLst/>
+          </a:prstGeom>
+        </p:spPr>
+        <p:txBody>
+          <a:bodyPr vert="horz" lIns="91440" tIns="45720" rIns="91440" bIns="45720" rtlCol="0" anchor="b"/>
+          <a:lstStyle>
+            <a:lvl1pPr algn="r">
+              <a:defRPr sz="1200"/>
+            </a:lvl1pPr>
+          </a:lstStyle>
+          <a:p>
+            <a:fld id="{CE5E9CC1-C706-0F49-92D6-E571CC5EEA8F}" type="slidenum">
+              <a:rPr lang="en-US"/>
+              <a:t>‹#›</a:t>
+            </a:fld>
+            <a:endParaRPr lang="en-US"/>
+          </a:p>
+        </p:txBody>
+      </p:sp>
     </p:spTree>
     <p:extLst>
       <p:ext uri="{BB962C8B-B14F-4D97-AF65-F5344CB8AC3E}">
-        <p14:creationId xmlns:p14="http://schemas.microsoft.com/office/powerpoint/2010/main" val="3828594511"/>
+        <p14:creationId xmlns:p14="http://schemas.microsoft.com/office/powerpoint/2010/main" val="1024086991"/>
       </p:ext>
     </p:extLst>
   </p:cSld>
@@ -295,6 +514,7 @@
               <a:rPr lang="en-US" dirty="0"/>
               <a:t>Giới thiệu: đây là bản trình bày định hướng thiết kế UI/UX cho nền tảng CCHC — trực thuộc Tổng hội Y học Việt Nam.</a:t>
             </a:r>
+            <a:endParaRPr lang="en-US" dirty="0"/>
           </a:p>
         </p:txBody>
       </p:sp>
@@ -382,6 +602,7 @@
               <a:rPr lang="en-US" dirty="0"/>
               <a:t>Vòng lặp giá trị: Chuyên gia → Tri thức → Cộng đồng → thu hút thêm chuyên gia.</a:t>
             </a:r>
+            <a:endParaRPr lang="en-US" dirty="0"/>
           </a:p>
         </p:txBody>
       </p:sp>
@@ -469,6 +690,7 @@
               <a:rPr lang="en-US" dirty="0"/>
               <a:t>Kết: thiết kế phục vụ một mục tiêu — chuyển uy tín thể chế thành niềm tin của người dùng, và niềm tin thành giá trị.</a:t>
             </a:r>
+            <a:endParaRPr lang="en-US" dirty="0"/>
           </a:p>
         </p:txBody>
       </p:sp>
@@ -556,6 +778,7 @@
               <a:rPr lang="en-US" dirty="0"/>
               <a:t>Con hào = lớp Chính danh. Uy tín Tổng hội không mua được bằng marketing, không startup nào sao chép nổi trong ngắn hạn.</a:t>
             </a:r>
+            <a:endParaRPr lang="en-US" dirty="0"/>
           </a:p>
         </p:txBody>
       </p:sp>
@@ -643,6 +866,7 @@
               <a:rPr lang="en-US" dirty="0"/>
               <a:t>Meta-trust: công khai cả bộ khung 4 lớp để người dùng tin vào chính quy trình tạo ra thông tin.</a:t>
             </a:r>
+            <a:endParaRPr lang="en-US" dirty="0"/>
           </a:p>
         </p:txBody>
       </p:sp>
@@ -730,6 +954,7 @@
               <a:rPr lang="en-US" dirty="0"/>
               <a:t>Năm triết lý rút từ hồ sơ UX; mỗi triết lý đều có bằng chứng định lượng đi kèm.</a:t>
             </a:r>
+            <a:endParaRPr lang="en-US" dirty="0"/>
           </a:p>
         </p:txBody>
       </p:sp>
@@ -817,6 +1042,7 @@
               <a:rPr lang="en-US" dirty="0"/>
               <a:t>Trên desktop, cùng IA mở rộng thành header hai tầng + mega-menu 7 nhánh — không phải cấu trúc khác.</a:t>
             </a:r>
+            <a:endParaRPr lang="en-US" dirty="0"/>
           </a:p>
         </p:txBody>
       </p:sp>
@@ -904,6 +1130,7 @@
               <a:rPr lang="en-US" dirty="0"/>
               <a:t>73% người Việt không phân biệt được tin y tế đúng/sai (UNICEF 2021) — nên chính danh phải hiển thị sớm.</a:t>
             </a:r>
+            <a:endParaRPr lang="en-US" dirty="0"/>
           </a:p>
         </p:txBody>
       </p:sp>
@@ -991,6 +1218,7 @@
               <a:rPr lang="en-US" dirty="0"/>
               <a:t>Chuẩn bắt buộc cho mọi template bài viết trên toàn hệ thống CCHC.</a:t>
             </a:r>
+            <a:endParaRPr lang="en-US" dirty="0"/>
           </a:p>
         </p:txBody>
       </p:sp>
@@ -1078,6 +1306,7 @@
               <a:rPr lang="en-US" dirty="0"/>
               <a:t>Bốn trụ cột đặt ở grid 2×2 vừa vặn vùng ngón cái trên điện thoại.</a:t>
             </a:r>
+            <a:endParaRPr lang="en-US" dirty="0"/>
           </a:p>
         </p:txBody>
       </p:sp>
@@ -1165,6 +1394,7 @@
               <a:rPr lang="en-US" dirty="0"/>
               <a:t>Đây là điểm khách hàng thường hỏi: vì sao chọn xanh. Xanh là quy ước của ngành y tế + phát tín hiệu thẩm quyền.</a:t>
             </a:r>
+            <a:endParaRPr lang="en-US" dirty="0"/>
           </a:p>
         </p:txBody>
       </p:sp>
@@ -1237,11 +1467,6 @@
 <file path=ppt/slideMasters/slideMaster1.xml><?xml version="1.0" encoding="utf-8"?>
 <p:sldMaster xmlns:a="http://schemas.openxmlformats.org/drawingml/2006/main" xmlns:r="http://schemas.openxmlformats.org/officeDocument/2006/relationships" xmlns:p="http://schemas.openxmlformats.org/presentationml/2006/main">
   <p:cSld>
-    <p:bg>
-      <p:bgRef idx="1001">
-        <a:schemeClr val="bg1"/>
-      </p:bgRef>
-    </p:bg>
     <p:spTree>
       <p:nvGrpSpPr>
         <p:cNvPr id="1" name=""/>
@@ -1522,9 +1747,8 @@
     <p:bg>
       <p:bgPr>
         <a:solidFill>
-          <a:srgbClr val="012932"/>
+          <a:srgbClr val="0A1E42"/>
         </a:solidFill>
-        <a:effectLst/>
       </p:bgPr>
     </p:bg>
     <p:spTree>
@@ -1556,19 +1780,12 @@
             <a:avLst/>
           </a:prstGeom>
           <a:solidFill>
-            <a:srgbClr val="037B96">
+            <a:srgbClr val="1D4ED8">
               <a:alpha val="22000"/>
             </a:srgbClr>
           </a:solidFill>
           <a:ln/>
         </p:spPr>
-        <p:txBody>
-          <a:bodyPr/>
-          <a:lstStyle/>
-          <a:p>
-            <a:endParaRPr lang="en-US"/>
-          </a:p>
-        </p:txBody>
       </p:sp>
       <p:sp>
         <p:nvSpPr>
@@ -1585,19 +1802,12 @@
             <a:avLst/>
           </a:prstGeom>
           <a:solidFill>
-            <a:srgbClr val="82E6FD">
+            <a:srgbClr val="8FB4FF">
               <a:alpha val="18000"/>
             </a:srgbClr>
           </a:solidFill>
           <a:ln/>
         </p:spPr>
-        <p:txBody>
-          <a:bodyPr/>
-          <a:lstStyle/>
-          <a:p>
-            <a:endParaRPr lang="en-US"/>
-          </a:p>
-        </p:txBody>
       </p:sp>
       <p:sp>
         <p:nvSpPr>
@@ -1614,19 +1824,12 @@
             <a:avLst/>
           </a:prstGeom>
           <a:solidFill>
-            <a:srgbClr val="82E6FD">
+            <a:srgbClr val="8FB4FF">
               <a:alpha val="40000"/>
             </a:srgbClr>
           </a:solidFill>
           <a:ln/>
         </p:spPr>
-        <p:txBody>
-          <a:bodyPr/>
-          <a:lstStyle/>
-          <a:p>
-            <a:endParaRPr lang="en-US"/>
-          </a:p>
-        </p:txBody>
       </p:sp>
       <p:sp>
         <p:nvSpPr>
@@ -1649,13 +1852,13 @@
           <a:bodyPr wrap="square" lIns="0" tIns="0" rIns="0" bIns="0" rtlCol="0" anchor="ctr"/>
           <a:lstStyle/>
           <a:p>
-            <a:pPr marL="0" indent="0">
-              <a:buNone/>
-            </a:pPr>
-            <a:r>
-              <a:rPr lang="en-US" sz="1500" b="1" kern="0" spc="300" dirty="0">
-                <a:solidFill>
-                  <a:srgbClr val="82E6FD"/>
+            <a:pPr indent="0" marL="0">
+              <a:buNone/>
+            </a:pPr>
+            <a:r>
+              <a:rPr lang="en-US" sz="1500" b="1" spc="300" kern="0" dirty="0">
+                <a:solidFill>
+                  <a:srgbClr val="8FB4FF"/>
                 </a:solidFill>
                 <a:latin typeface="Calibri" pitchFamily="34" charset="0"/>
                 <a:ea typeface="Calibri" pitchFamily="34" charset="-122"/>
@@ -1688,7 +1891,7 @@
           <a:bodyPr wrap="square" lIns="0" tIns="0" rIns="0" bIns="0" rtlCol="0" anchor="ctr"/>
           <a:lstStyle/>
           <a:p>
-            <a:pPr marL="0" indent="0">
+            <a:pPr indent="0" marL="0">
               <a:buNone/>
             </a:pPr>
             <a:r>
@@ -1727,13 +1930,13 @@
           <a:bodyPr wrap="square" lIns="0" tIns="0" rIns="0" bIns="0" rtlCol="0" anchor="ctr"/>
           <a:lstStyle/>
           <a:p>
-            <a:pPr marL="0" indent="0">
+            <a:pPr indent="0" marL="0">
               <a:buNone/>
             </a:pPr>
             <a:r>
               <a:rPr lang="en-US" sz="3400" dirty="0">
                 <a:solidFill>
-                  <a:srgbClr val="82E6FD"/>
+                  <a:srgbClr val="8FB4FF"/>
                 </a:solidFill>
                 <a:latin typeface="Cambria" pitchFamily="34" charset="0"/>
                 <a:ea typeface="Cambria" pitchFamily="34" charset="-122"/>
@@ -1766,13 +1969,13 @@
           <a:bodyPr wrap="square" lIns="0" tIns="0" rIns="0" bIns="0" rtlCol="0" anchor="ctr"/>
           <a:lstStyle/>
           <a:p>
-            <a:pPr marL="0" indent="0">
+            <a:pPr indent="0" marL="0">
               <a:buNone/>
             </a:pPr>
             <a:r>
               <a:rPr lang="en-US" sz="1500" dirty="0">
                 <a:solidFill>
-                  <a:srgbClr val="CFE8F0"/>
+                  <a:srgbClr val="C9D8F5"/>
                 </a:solidFill>
                 <a:latin typeface="Calibri" pitchFamily="34" charset="0"/>
                 <a:ea typeface="Calibri" pitchFamily="34" charset="-122"/>
@@ -1805,13 +2008,13 @@
           <a:bodyPr wrap="square" lIns="0" tIns="0" rIns="0" bIns="0" rtlCol="0" anchor="ctr"/>
           <a:lstStyle/>
           <a:p>
-            <a:pPr marL="0" indent="0">
+            <a:pPr indent="0" marL="0">
               <a:buNone/>
             </a:pPr>
             <a:r>
               <a:rPr lang="en-US" sz="1300" i="1" dirty="0">
                 <a:solidFill>
-                  <a:srgbClr val="9FC7D3"/>
+                  <a:srgbClr val="A9BCE6"/>
                 </a:solidFill>
                 <a:latin typeface="Calibri" pitchFamily="34" charset="0"/>
                 <a:ea typeface="Calibri" pitchFamily="34" charset="-122"/>
@@ -1839,7 +2042,6 @@
         <a:solidFill>
           <a:srgbClr val="FFFFFF"/>
         </a:solidFill>
-        <a:effectLst/>
       </p:bgPr>
     </p:bg>
     <p:spTree>
@@ -1877,13 +2079,13 @@
           <a:bodyPr wrap="square" lIns="0" tIns="0" rIns="0" bIns="0" rtlCol="0" anchor="ctr"/>
           <a:lstStyle/>
           <a:p>
-            <a:pPr marL="0" indent="0" algn="l">
+            <a:pPr algn="l" indent="0" marL="0">
               <a:buNone/>
             </a:pPr>
             <a:r>
               <a:rPr lang="en-US" sz="3100" b="1" dirty="0">
                 <a:solidFill>
-                  <a:srgbClr val="012932"/>
+                  <a:srgbClr val="0A1E42"/>
                 </a:solidFill>
                 <a:latin typeface="Cambria" pitchFamily="34" charset="0"/>
                 <a:ea typeface="Cambria" pitchFamily="34" charset="-122"/>
@@ -1916,13 +2118,13 @@
           <a:bodyPr wrap="square" lIns="0" tIns="0" rIns="0" bIns="0" rtlCol="0" anchor="ctr"/>
           <a:lstStyle/>
           <a:p>
-            <a:pPr marL="0" indent="0">
+            <a:pPr indent="0" marL="0">
               <a:buNone/>
             </a:pPr>
             <a:r>
               <a:rPr lang="en-US" sz="1500" b="1" dirty="0">
                 <a:solidFill>
-                  <a:srgbClr val="037B96"/>
+                  <a:srgbClr val="1D4ED8"/>
                 </a:solidFill>
                 <a:latin typeface="Calibri" pitchFamily="34" charset="0"/>
                 <a:ea typeface="Calibri" pitchFamily="34" charset="-122"/>
@@ -1951,29 +2153,22 @@
             </a:avLst>
           </a:prstGeom>
           <a:solidFill>
-            <a:srgbClr val="EAF7FB"/>
+            <a:srgbClr val="EEF3FC"/>
           </a:solidFill>
           <a:ln w="12700">
             <a:solidFill>
-              <a:srgbClr val="D6E9EF"/>
+              <a:srgbClr val="DCE6F5"/>
             </a:solidFill>
             <a:prstDash val="solid"/>
           </a:ln>
           <a:effectLst>
-            <a:outerShdw blurRad="114300" dist="38100" dir="5400000" algn="bl" rotWithShape="0">
-              <a:srgbClr val="012932">
-                <a:alpha val="16000"/>
+            <a:outerShdw sx="100000" sy="100000" kx="0" ky="0" algn="bl" rotWithShape="0" blurRad="114300" dist="38100" dir="5400000">
+              <a:srgbClr val="0A1E42">
+                <a:alpha val="18000"/>
               </a:srgbClr>
             </a:outerShdw>
           </a:effectLst>
         </p:spPr>
-        <p:txBody>
-          <a:bodyPr/>
-          <a:lstStyle/>
-          <a:p>
-            <a:endParaRPr lang="en-US"/>
-          </a:p>
-        </p:txBody>
       </p:sp>
       <p:sp>
         <p:nvSpPr>
@@ -1996,13 +2191,13 @@
           <a:bodyPr wrap="square" lIns="0" tIns="0" rIns="0" bIns="0" rtlCol="0" anchor="ctr"/>
           <a:lstStyle/>
           <a:p>
-            <a:pPr marL="0" indent="0">
+            <a:pPr indent="0" marL="0">
               <a:buNone/>
             </a:pPr>
             <a:r>
               <a:rPr lang="en-US" sz="1500" b="1" dirty="0">
                 <a:solidFill>
-                  <a:srgbClr val="012932"/>
+                  <a:srgbClr val="0A1E42"/>
                 </a:solidFill>
                 <a:latin typeface="Cambria" pitchFamily="34" charset="0"/>
                 <a:ea typeface="Cambria" pitchFamily="34" charset="-122"/>
@@ -2035,13 +2230,13 @@
           <a:bodyPr wrap="square" lIns="0" tIns="0" rIns="0" bIns="0" rtlCol="0" anchor="ctr"/>
           <a:lstStyle/>
           <a:p>
-            <a:pPr marL="0" indent="0">
+            <a:pPr indent="0" marL="0">
               <a:buNone/>
             </a:pPr>
             <a:r>
               <a:rPr lang="en-US" sz="1250" dirty="0">
                 <a:solidFill>
-                  <a:srgbClr val="11333A"/>
+                  <a:srgbClr val="13223F"/>
                 </a:solidFill>
                 <a:latin typeface="Calibri" pitchFamily="34" charset="0"/>
                 <a:ea typeface="Calibri" pitchFamily="34" charset="-122"/>
@@ -2070,29 +2265,22 @@
             </a:avLst>
           </a:prstGeom>
           <a:solidFill>
-            <a:srgbClr val="EAF7FB"/>
+            <a:srgbClr val="EEF3FC"/>
           </a:solidFill>
           <a:ln w="12700">
             <a:solidFill>
-              <a:srgbClr val="D6E9EF"/>
+              <a:srgbClr val="DCE6F5"/>
             </a:solidFill>
             <a:prstDash val="solid"/>
           </a:ln>
           <a:effectLst>
-            <a:outerShdw blurRad="114300" dist="38100" dir="5400000" algn="bl" rotWithShape="0">
-              <a:srgbClr val="012932">
-                <a:alpha val="16000"/>
+            <a:outerShdw sx="100000" sy="100000" kx="0" ky="0" algn="bl" rotWithShape="0" blurRad="114300" dist="38100" dir="5400000">
+              <a:srgbClr val="0A1E42">
+                <a:alpha val="18000"/>
               </a:srgbClr>
             </a:outerShdw>
           </a:effectLst>
         </p:spPr>
-        <p:txBody>
-          <a:bodyPr/>
-          <a:lstStyle/>
-          <a:p>
-            <a:endParaRPr lang="en-US"/>
-          </a:p>
-        </p:txBody>
       </p:sp>
       <p:sp>
         <p:nvSpPr>
@@ -2115,13 +2303,13 @@
           <a:bodyPr wrap="square" lIns="0" tIns="0" rIns="0" bIns="0" rtlCol="0" anchor="ctr"/>
           <a:lstStyle/>
           <a:p>
-            <a:pPr marL="0" indent="0">
+            <a:pPr indent="0" marL="0">
               <a:buNone/>
             </a:pPr>
             <a:r>
               <a:rPr lang="en-US" sz="1500" b="1" dirty="0">
                 <a:solidFill>
-                  <a:srgbClr val="012932"/>
+                  <a:srgbClr val="0A1E42"/>
                 </a:solidFill>
                 <a:latin typeface="Cambria" pitchFamily="34" charset="0"/>
                 <a:ea typeface="Cambria" pitchFamily="34" charset="-122"/>
@@ -2154,13 +2342,13 @@
           <a:bodyPr wrap="square" lIns="0" tIns="0" rIns="0" bIns="0" rtlCol="0" anchor="ctr"/>
           <a:lstStyle/>
           <a:p>
-            <a:pPr marL="0" indent="0">
+            <a:pPr indent="0" marL="0">
               <a:buNone/>
             </a:pPr>
             <a:r>
               <a:rPr lang="en-US" sz="1250" dirty="0">
                 <a:solidFill>
-                  <a:srgbClr val="11333A"/>
+                  <a:srgbClr val="13223F"/>
                 </a:solidFill>
                 <a:latin typeface="Calibri" pitchFamily="34" charset="0"/>
                 <a:ea typeface="Calibri" pitchFamily="34" charset="-122"/>
@@ -2189,29 +2377,22 @@
             </a:avLst>
           </a:prstGeom>
           <a:solidFill>
-            <a:srgbClr val="EAF7FB"/>
+            <a:srgbClr val="EEF3FC"/>
           </a:solidFill>
           <a:ln w="12700">
             <a:solidFill>
-              <a:srgbClr val="D6E9EF"/>
+              <a:srgbClr val="DCE6F5"/>
             </a:solidFill>
             <a:prstDash val="solid"/>
           </a:ln>
           <a:effectLst>
-            <a:outerShdw blurRad="114300" dist="38100" dir="5400000" algn="bl" rotWithShape="0">
-              <a:srgbClr val="012932">
-                <a:alpha val="16000"/>
+            <a:outerShdw sx="100000" sy="100000" kx="0" ky="0" algn="bl" rotWithShape="0" blurRad="114300" dist="38100" dir="5400000">
+              <a:srgbClr val="0A1E42">
+                <a:alpha val="18000"/>
               </a:srgbClr>
             </a:outerShdw>
           </a:effectLst>
         </p:spPr>
-        <p:txBody>
-          <a:bodyPr/>
-          <a:lstStyle/>
-          <a:p>
-            <a:endParaRPr lang="en-US"/>
-          </a:p>
-        </p:txBody>
       </p:sp>
       <p:sp>
         <p:nvSpPr>
@@ -2234,13 +2415,13 @@
           <a:bodyPr wrap="square" lIns="0" tIns="0" rIns="0" bIns="0" rtlCol="0" anchor="ctr"/>
           <a:lstStyle/>
           <a:p>
-            <a:pPr marL="0" indent="0">
+            <a:pPr indent="0" marL="0">
               <a:buNone/>
             </a:pPr>
             <a:r>
               <a:rPr lang="en-US" sz="1500" b="1" dirty="0">
                 <a:solidFill>
-                  <a:srgbClr val="012932"/>
+                  <a:srgbClr val="0A1E42"/>
                 </a:solidFill>
                 <a:latin typeface="Cambria" pitchFamily="34" charset="0"/>
                 <a:ea typeface="Cambria" pitchFamily="34" charset="-122"/>
@@ -2273,13 +2454,13 @@
           <a:bodyPr wrap="square" lIns="0" tIns="0" rIns="0" bIns="0" rtlCol="0" anchor="ctr"/>
           <a:lstStyle/>
           <a:p>
-            <a:pPr marL="0" indent="0">
+            <a:pPr indent="0" marL="0">
               <a:buNone/>
             </a:pPr>
             <a:r>
               <a:rPr lang="en-US" sz="1250" dirty="0">
                 <a:solidFill>
-                  <a:srgbClr val="11333A"/>
+                  <a:srgbClr val="13223F"/>
                 </a:solidFill>
                 <a:latin typeface="Calibri" pitchFamily="34" charset="0"/>
                 <a:ea typeface="Calibri" pitchFamily="34" charset="-122"/>
@@ -2308,29 +2489,22 @@
             </a:avLst>
           </a:prstGeom>
           <a:solidFill>
-            <a:srgbClr val="EAF7FB"/>
+            <a:srgbClr val="EEF3FC"/>
           </a:solidFill>
           <a:ln w="12700">
             <a:solidFill>
-              <a:srgbClr val="D6E9EF"/>
+              <a:srgbClr val="DCE6F5"/>
             </a:solidFill>
             <a:prstDash val="solid"/>
           </a:ln>
           <a:effectLst>
-            <a:outerShdw blurRad="114300" dist="38100" dir="5400000" algn="bl" rotWithShape="0">
-              <a:srgbClr val="012932">
-                <a:alpha val="16000"/>
+            <a:outerShdw sx="100000" sy="100000" kx="0" ky="0" algn="bl" rotWithShape="0" blurRad="114300" dist="38100" dir="5400000">
+              <a:srgbClr val="0A1E42">
+                <a:alpha val="18000"/>
               </a:srgbClr>
             </a:outerShdw>
           </a:effectLst>
         </p:spPr>
-        <p:txBody>
-          <a:bodyPr/>
-          <a:lstStyle/>
-          <a:p>
-            <a:endParaRPr lang="en-US"/>
-          </a:p>
-        </p:txBody>
       </p:sp>
       <p:sp>
         <p:nvSpPr>
@@ -2353,13 +2527,13 @@
           <a:bodyPr wrap="square" lIns="0" tIns="0" rIns="0" bIns="0" rtlCol="0" anchor="ctr"/>
           <a:lstStyle/>
           <a:p>
-            <a:pPr marL="0" indent="0">
+            <a:pPr indent="0" marL="0">
               <a:buNone/>
             </a:pPr>
             <a:r>
               <a:rPr lang="en-US" sz="1500" b="1" dirty="0">
                 <a:solidFill>
-                  <a:srgbClr val="012932"/>
+                  <a:srgbClr val="0A1E42"/>
                 </a:solidFill>
                 <a:latin typeface="Cambria" pitchFamily="34" charset="0"/>
                 <a:ea typeface="Cambria" pitchFamily="34" charset="-122"/>
@@ -2392,13 +2566,13 @@
           <a:bodyPr wrap="square" lIns="0" tIns="0" rIns="0" bIns="0" rtlCol="0" anchor="ctr"/>
           <a:lstStyle/>
           <a:p>
-            <a:pPr marL="0" indent="0">
+            <a:pPr indent="0" marL="0">
               <a:buNone/>
             </a:pPr>
             <a:r>
               <a:rPr lang="en-US" sz="1250" dirty="0">
                 <a:solidFill>
-                  <a:srgbClr val="11333A"/>
+                  <a:srgbClr val="13223F"/>
                 </a:solidFill>
                 <a:latin typeface="Calibri" pitchFamily="34" charset="0"/>
                 <a:ea typeface="Calibri" pitchFamily="34" charset="-122"/>
@@ -2427,29 +2601,22 @@
             </a:avLst>
           </a:prstGeom>
           <a:solidFill>
-            <a:srgbClr val="EAF7FB"/>
+            <a:srgbClr val="EEF3FC"/>
           </a:solidFill>
           <a:ln w="12700">
             <a:solidFill>
-              <a:srgbClr val="D6E9EF"/>
+              <a:srgbClr val="DCE6F5"/>
             </a:solidFill>
             <a:prstDash val="solid"/>
           </a:ln>
           <a:effectLst>
-            <a:outerShdw blurRad="114300" dist="38100" dir="5400000" algn="bl" rotWithShape="0">
-              <a:srgbClr val="012932">
-                <a:alpha val="16000"/>
+            <a:outerShdw sx="100000" sy="100000" kx="0" ky="0" algn="bl" rotWithShape="0" blurRad="114300" dist="38100" dir="5400000">
+              <a:srgbClr val="0A1E42">
+                <a:alpha val="18000"/>
               </a:srgbClr>
             </a:outerShdw>
           </a:effectLst>
         </p:spPr>
-        <p:txBody>
-          <a:bodyPr/>
-          <a:lstStyle/>
-          <a:p>
-            <a:endParaRPr lang="en-US"/>
-          </a:p>
-        </p:txBody>
       </p:sp>
       <p:sp>
         <p:nvSpPr>
@@ -2472,13 +2639,13 @@
           <a:bodyPr wrap="square" lIns="0" tIns="0" rIns="0" bIns="0" rtlCol="0" anchor="ctr"/>
           <a:lstStyle/>
           <a:p>
-            <a:pPr marL="0" indent="0">
+            <a:pPr indent="0" marL="0">
               <a:buNone/>
             </a:pPr>
             <a:r>
               <a:rPr lang="en-US" sz="1500" b="1" dirty="0">
                 <a:solidFill>
-                  <a:srgbClr val="012932"/>
+                  <a:srgbClr val="0A1E42"/>
                 </a:solidFill>
                 <a:latin typeface="Cambria" pitchFamily="34" charset="0"/>
                 <a:ea typeface="Cambria" pitchFamily="34" charset="-122"/>
@@ -2511,13 +2678,13 @@
           <a:bodyPr wrap="square" lIns="0" tIns="0" rIns="0" bIns="0" rtlCol="0" anchor="ctr"/>
           <a:lstStyle/>
           <a:p>
-            <a:pPr marL="0" indent="0">
+            <a:pPr indent="0" marL="0">
               <a:buNone/>
             </a:pPr>
             <a:r>
               <a:rPr lang="en-US" sz="1250" dirty="0">
                 <a:solidFill>
-                  <a:srgbClr val="11333A"/>
+                  <a:srgbClr val="13223F"/>
                 </a:solidFill>
                 <a:latin typeface="Calibri" pitchFamily="34" charset="0"/>
                 <a:ea typeface="Calibri" pitchFamily="34" charset="-122"/>
@@ -2550,13 +2717,13 @@
           <a:bodyPr wrap="square" lIns="0" tIns="0" rIns="0" bIns="0" rtlCol="0" anchor="ctr"/>
           <a:lstStyle/>
           <a:p>
-            <a:pPr marL="0" indent="0">
+            <a:pPr indent="0" marL="0">
               <a:buNone/>
             </a:pPr>
             <a:r>
               <a:rPr lang="en-US" sz="1500" b="1" dirty="0">
                 <a:solidFill>
-                  <a:srgbClr val="037B96"/>
+                  <a:srgbClr val="1D4ED8"/>
                 </a:solidFill>
                 <a:latin typeface="Calibri" pitchFamily="34" charset="0"/>
                 <a:ea typeface="Calibri" pitchFamily="34" charset="-122"/>
@@ -2585,29 +2752,22 @@
             </a:avLst>
           </a:prstGeom>
           <a:solidFill>
-            <a:srgbClr val="EAF7FB"/>
+            <a:srgbClr val="EEF3FC"/>
           </a:solidFill>
           <a:ln w="12700">
             <a:solidFill>
-              <a:srgbClr val="D6E9EF"/>
+              <a:srgbClr val="DCE6F5"/>
             </a:solidFill>
             <a:prstDash val="solid"/>
           </a:ln>
           <a:effectLst>
-            <a:outerShdw blurRad="114300" dist="38100" dir="5400000" algn="bl" rotWithShape="0">
-              <a:srgbClr val="012932">
-                <a:alpha val="16000"/>
+            <a:outerShdw sx="100000" sy="100000" kx="0" ky="0" algn="bl" rotWithShape="0" blurRad="114300" dist="38100" dir="5400000">
+              <a:srgbClr val="0A1E42">
+                <a:alpha val="18000"/>
               </a:srgbClr>
             </a:outerShdw>
           </a:effectLst>
         </p:spPr>
-        <p:txBody>
-          <a:bodyPr/>
-          <a:lstStyle/>
-          <a:p>
-            <a:endParaRPr lang="en-US"/>
-          </a:p>
-        </p:txBody>
       </p:sp>
       <p:sp>
         <p:nvSpPr>
@@ -2624,22 +2784,15 @@
             <a:avLst/>
           </a:prstGeom>
           <a:solidFill>
-            <a:srgbClr val="012932"/>
+            <a:srgbClr val="0A1E42"/>
           </a:solidFill>
           <a:ln w="12700">
             <a:solidFill>
-              <a:srgbClr val="012932"/>
+              <a:srgbClr val="0A1E42"/>
             </a:solidFill>
             <a:prstDash val="solid"/>
           </a:ln>
         </p:spPr>
-        <p:txBody>
-          <a:bodyPr/>
-          <a:lstStyle/>
-          <a:p>
-            <a:endParaRPr lang="en-US"/>
-          </a:p>
-        </p:txBody>
       </p:sp>
       <p:sp>
         <p:nvSpPr>
@@ -2662,7 +2815,7 @@
           <a:bodyPr wrap="square" lIns="0" tIns="0" rIns="0" bIns="0" rtlCol="0" anchor="ctr"/>
           <a:lstStyle/>
           <a:p>
-            <a:pPr marL="0" indent="0" algn="ctr">
+            <a:pPr algn="ctr" indent="0" marL="0">
               <a:buNone/>
             </a:pPr>
             <a:r>
@@ -2701,13 +2854,13 @@
           <a:bodyPr wrap="square" lIns="0" tIns="0" rIns="0" bIns="0" rtlCol="0" anchor="ctr"/>
           <a:lstStyle/>
           <a:p>
-            <a:pPr marL="0" indent="0">
+            <a:pPr indent="0" marL="0">
               <a:buNone/>
             </a:pPr>
             <a:r>
               <a:rPr lang="en-US" sz="1600" b="1" dirty="0">
                 <a:solidFill>
-                  <a:srgbClr val="012932"/>
+                  <a:srgbClr val="0A1E42"/>
                 </a:solidFill>
                 <a:latin typeface="Cambria" pitchFamily="34" charset="0"/>
                 <a:ea typeface="Cambria" pitchFamily="34" charset="-122"/>
@@ -2740,7 +2893,7 @@
           <a:bodyPr wrap="square" lIns="0" tIns="0" rIns="0" bIns="0" rtlCol="0" anchor="t"/>
           <a:lstStyle/>
           <a:p>
-            <a:pPr marL="0" indent="0">
+            <a:pPr indent="0" marL="0">
               <a:lnSpc>
                 <a:spcPct val="103000"/>
               </a:lnSpc>
@@ -2749,7 +2902,7 @@
             <a:r>
               <a:rPr lang="en-US" sz="1250" dirty="0">
                 <a:solidFill>
-                  <a:srgbClr val="11333A"/>
+                  <a:srgbClr val="13223F"/>
                 </a:solidFill>
                 <a:latin typeface="Calibri" pitchFamily="34" charset="0"/>
                 <a:ea typeface="Calibri" pitchFamily="34" charset="-122"/>
@@ -2778,29 +2931,22 @@
             </a:avLst>
           </a:prstGeom>
           <a:solidFill>
-            <a:srgbClr val="EAF7FB"/>
+            <a:srgbClr val="EEF3FC"/>
           </a:solidFill>
           <a:ln w="12700">
             <a:solidFill>
-              <a:srgbClr val="D6E9EF"/>
+              <a:srgbClr val="DCE6F5"/>
             </a:solidFill>
             <a:prstDash val="solid"/>
           </a:ln>
           <a:effectLst>
-            <a:outerShdw blurRad="114300" dist="38100" dir="5400000" algn="bl" rotWithShape="0">
-              <a:srgbClr val="012932">
-                <a:alpha val="16000"/>
+            <a:outerShdw sx="100000" sy="100000" kx="0" ky="0" algn="bl" rotWithShape="0" blurRad="114300" dist="38100" dir="5400000">
+              <a:srgbClr val="0A1E42">
+                <a:alpha val="18000"/>
               </a:srgbClr>
             </a:outerShdw>
           </a:effectLst>
         </p:spPr>
-        <p:txBody>
-          <a:bodyPr/>
-          <a:lstStyle/>
-          <a:p>
-            <a:endParaRPr lang="en-US"/>
-          </a:p>
-        </p:txBody>
       </p:sp>
       <p:sp>
         <p:nvSpPr>
@@ -2817,22 +2963,15 @@
             <a:avLst/>
           </a:prstGeom>
           <a:solidFill>
-            <a:srgbClr val="037B96"/>
+            <a:srgbClr val="1D4ED8"/>
           </a:solidFill>
           <a:ln w="12700">
             <a:solidFill>
-              <a:srgbClr val="037B96"/>
+              <a:srgbClr val="1D4ED8"/>
             </a:solidFill>
             <a:prstDash val="solid"/>
           </a:ln>
         </p:spPr>
-        <p:txBody>
-          <a:bodyPr/>
-          <a:lstStyle/>
-          <a:p>
-            <a:endParaRPr lang="en-US"/>
-          </a:p>
-        </p:txBody>
       </p:sp>
       <p:sp>
         <p:nvSpPr>
@@ -2855,7 +2994,7 @@
           <a:bodyPr wrap="square" lIns="0" tIns="0" rIns="0" bIns="0" rtlCol="0" anchor="ctr"/>
           <a:lstStyle/>
           <a:p>
-            <a:pPr marL="0" indent="0" algn="ctr">
+            <a:pPr algn="ctr" indent="0" marL="0">
               <a:buNone/>
             </a:pPr>
             <a:r>
@@ -2894,13 +3033,13 @@
           <a:bodyPr wrap="square" lIns="0" tIns="0" rIns="0" bIns="0" rtlCol="0" anchor="ctr"/>
           <a:lstStyle/>
           <a:p>
-            <a:pPr marL="0" indent="0">
+            <a:pPr indent="0" marL="0">
               <a:buNone/>
             </a:pPr>
             <a:r>
               <a:rPr lang="en-US" sz="1600" b="1" dirty="0">
                 <a:solidFill>
-                  <a:srgbClr val="012932"/>
+                  <a:srgbClr val="0A1E42"/>
                 </a:solidFill>
                 <a:latin typeface="Cambria" pitchFamily="34" charset="0"/>
                 <a:ea typeface="Cambria" pitchFamily="34" charset="-122"/>
@@ -2933,7 +3072,7 @@
           <a:bodyPr wrap="square" lIns="0" tIns="0" rIns="0" bIns="0" rtlCol="0" anchor="t"/>
           <a:lstStyle/>
           <a:p>
-            <a:pPr marL="0" indent="0">
+            <a:pPr indent="0" marL="0">
               <a:lnSpc>
                 <a:spcPct val="103000"/>
               </a:lnSpc>
@@ -2942,7 +3081,7 @@
             <a:r>
               <a:rPr lang="en-US" sz="1250" dirty="0">
                 <a:solidFill>
-                  <a:srgbClr val="11333A"/>
+                  <a:srgbClr val="13223F"/>
                 </a:solidFill>
                 <a:latin typeface="Calibri" pitchFamily="34" charset="0"/>
                 <a:ea typeface="Calibri" pitchFamily="34" charset="-122"/>
@@ -2971,29 +3110,22 @@
             </a:avLst>
           </a:prstGeom>
           <a:solidFill>
-            <a:srgbClr val="EAF7FB"/>
+            <a:srgbClr val="EEF3FC"/>
           </a:solidFill>
           <a:ln w="12700">
             <a:solidFill>
-              <a:srgbClr val="D6E9EF"/>
+              <a:srgbClr val="DCE6F5"/>
             </a:solidFill>
             <a:prstDash val="solid"/>
           </a:ln>
           <a:effectLst>
-            <a:outerShdw blurRad="114300" dist="38100" dir="5400000" algn="bl" rotWithShape="0">
-              <a:srgbClr val="012932">
-                <a:alpha val="16000"/>
+            <a:outerShdw sx="100000" sy="100000" kx="0" ky="0" algn="bl" rotWithShape="0" blurRad="114300" dist="38100" dir="5400000">
+              <a:srgbClr val="0A1E42">
+                <a:alpha val="18000"/>
               </a:srgbClr>
             </a:outerShdw>
           </a:effectLst>
         </p:spPr>
-        <p:txBody>
-          <a:bodyPr/>
-          <a:lstStyle/>
-          <a:p>
-            <a:endParaRPr lang="en-US"/>
-          </a:p>
-        </p:txBody>
       </p:sp>
       <p:sp>
         <p:nvSpPr>
@@ -3010,22 +3142,15 @@
             <a:avLst/>
           </a:prstGeom>
           <a:solidFill>
-            <a:srgbClr val="012932"/>
+            <a:srgbClr val="0A1E42"/>
           </a:solidFill>
           <a:ln w="12700">
             <a:solidFill>
-              <a:srgbClr val="012932"/>
+              <a:srgbClr val="0A1E42"/>
             </a:solidFill>
             <a:prstDash val="solid"/>
           </a:ln>
         </p:spPr>
-        <p:txBody>
-          <a:bodyPr/>
-          <a:lstStyle/>
-          <a:p>
-            <a:endParaRPr lang="en-US"/>
-          </a:p>
-        </p:txBody>
       </p:sp>
       <p:sp>
         <p:nvSpPr>
@@ -3048,7 +3173,7 @@
           <a:bodyPr wrap="square" lIns="0" tIns="0" rIns="0" bIns="0" rtlCol="0" anchor="ctr"/>
           <a:lstStyle/>
           <a:p>
-            <a:pPr marL="0" indent="0" algn="ctr">
+            <a:pPr algn="ctr" indent="0" marL="0">
               <a:buNone/>
             </a:pPr>
             <a:r>
@@ -3087,13 +3212,13 @@
           <a:bodyPr wrap="square" lIns="0" tIns="0" rIns="0" bIns="0" rtlCol="0" anchor="ctr"/>
           <a:lstStyle/>
           <a:p>
-            <a:pPr marL="0" indent="0">
+            <a:pPr indent="0" marL="0">
               <a:buNone/>
             </a:pPr>
             <a:r>
               <a:rPr lang="en-US" sz="1600" b="1" dirty="0">
                 <a:solidFill>
-                  <a:srgbClr val="012932"/>
+                  <a:srgbClr val="0A1E42"/>
                 </a:solidFill>
                 <a:latin typeface="Cambria" pitchFamily="34" charset="0"/>
                 <a:ea typeface="Cambria" pitchFamily="34" charset="-122"/>
@@ -3126,7 +3251,7 @@
           <a:bodyPr wrap="square" lIns="0" tIns="0" rIns="0" bIns="0" rtlCol="0" anchor="t"/>
           <a:lstStyle/>
           <a:p>
-            <a:pPr marL="0" indent="0">
+            <a:pPr indent="0" marL="0">
               <a:lnSpc>
                 <a:spcPct val="103000"/>
               </a:lnSpc>
@@ -3135,7 +3260,7 @@
             <a:r>
               <a:rPr lang="en-US" sz="1250" dirty="0">
                 <a:solidFill>
-                  <a:srgbClr val="11333A"/>
+                  <a:srgbClr val="13223F"/>
                 </a:solidFill>
                 <a:latin typeface="Calibri" pitchFamily="34" charset="0"/>
                 <a:ea typeface="Calibri" pitchFamily="34" charset="-122"/>
@@ -3161,9 +3286,8 @@
     <p:bg>
       <p:bgPr>
         <a:solidFill>
-          <a:srgbClr val="012932"/>
+          <a:srgbClr val="0A1E42"/>
         </a:solidFill>
-        <a:effectLst/>
       </p:bgPr>
     </p:bg>
     <p:spTree>
@@ -3201,7 +3325,7 @@
           <a:bodyPr wrap="square" lIns="0" tIns="0" rIns="0" bIns="0" rtlCol="0" anchor="ctr"/>
           <a:lstStyle/>
           <a:p>
-            <a:pPr marL="0" indent="0" algn="l">
+            <a:pPr algn="l" indent="0" marL="0">
               <a:buNone/>
             </a:pPr>
             <a:r>
@@ -3213,40 +3337,7 @@
                 <a:ea typeface="Cambria" pitchFamily="34" charset="-122"/>
                 <a:cs typeface="Cambria" pitchFamily="34" charset="-120"/>
               </a:rPr>
-              <a:t>Chỉ số </a:t>
-            </a:r>
-            <a:r>
-              <a:rPr lang="en-US" sz="3100" b="1" dirty="0" err="1">
-                <a:solidFill>
-                  <a:srgbClr val="FFFFFF"/>
-                </a:solidFill>
-                <a:latin typeface="Cambria" pitchFamily="34" charset="0"/>
-                <a:ea typeface="Cambria" pitchFamily="34" charset="-122"/>
-                <a:cs typeface="Cambria" pitchFamily="34" charset="-120"/>
-              </a:rPr>
-              <a:t>thành</a:t>
-            </a:r>
-            <a:r>
-              <a:rPr lang="en-US" sz="3100" b="1" dirty="0">
-                <a:solidFill>
-                  <a:srgbClr val="FFFFFF"/>
-                </a:solidFill>
-                <a:latin typeface="Cambria" pitchFamily="34" charset="0"/>
-                <a:ea typeface="Cambria" pitchFamily="34" charset="-122"/>
-                <a:cs typeface="Cambria" pitchFamily="34" charset="-120"/>
-              </a:rPr>
-              <a:t> </a:t>
-            </a:r>
-            <a:r>
-              <a:rPr lang="en-US" sz="3100" b="1" dirty="0" err="1">
-                <a:solidFill>
-                  <a:srgbClr val="FFFFFF"/>
-                </a:solidFill>
-                <a:latin typeface="Cambria" pitchFamily="34" charset="0"/>
-                <a:ea typeface="Cambria" pitchFamily="34" charset="-122"/>
-                <a:cs typeface="Cambria" pitchFamily="34" charset="-120"/>
-              </a:rPr>
-              <a:t>cônG</a:t>
+              <a:t>Chỉ số thành công &amp; Bước tiếp theo</a:t>
             </a:r>
             <a:endParaRPr lang="en-US" sz="3100" dirty="0"/>
           </a:p>
@@ -3273,13 +3364,13 @@
           <a:bodyPr wrap="square" lIns="0" tIns="0" rIns="0" bIns="0" rtlCol="0" anchor="ctr"/>
           <a:lstStyle/>
           <a:p>
-            <a:pPr marL="0" indent="0">
-              <a:buNone/>
-            </a:pPr>
-            <a:r>
-              <a:rPr lang="en-US" sz="1400" b="1" kern="0" spc="200" dirty="0">
-                <a:solidFill>
-                  <a:srgbClr val="82E6FD"/>
+            <a:pPr indent="0" marL="0">
+              <a:buNone/>
+            </a:pPr>
+            <a:r>
+              <a:rPr lang="en-US" sz="1400" b="1" spc="200" kern="0" dirty="0">
+                <a:solidFill>
+                  <a:srgbClr val="8FB4FF"/>
                 </a:solidFill>
                 <a:latin typeface="Calibri" pitchFamily="34" charset="0"/>
                 <a:ea typeface="Calibri" pitchFamily="34" charset="-122"/>
@@ -3322,7 +3413,7 @@
             <a:r>
               <a:rPr lang="en-US" sz="1400" dirty="0">
                 <a:solidFill>
-                  <a:srgbClr val="E6F3F7"/>
+                  <a:srgbClr val="DCE7FB"/>
                 </a:solidFill>
                 <a:latin typeface="Calibri" pitchFamily="34" charset="0"/>
                 <a:ea typeface="Calibri" pitchFamily="34" charset="-122"/>
@@ -3343,7 +3434,7 @@
             <a:r>
               <a:rPr lang="en-US" sz="1400" dirty="0">
                 <a:solidFill>
-                  <a:srgbClr val="E6F3F7"/>
+                  <a:srgbClr val="DCE7FB"/>
                 </a:solidFill>
                 <a:latin typeface="Calibri" pitchFamily="34" charset="0"/>
                 <a:ea typeface="Calibri" pitchFamily="34" charset="-122"/>
@@ -3364,7 +3455,7 @@
             <a:r>
               <a:rPr lang="en-US" sz="1400" dirty="0">
                 <a:solidFill>
-                  <a:srgbClr val="E6F3F7"/>
+                  <a:srgbClr val="DCE7FB"/>
                 </a:solidFill>
                 <a:latin typeface="Calibri" pitchFamily="34" charset="0"/>
                 <a:ea typeface="Calibri" pitchFamily="34" charset="-122"/>
@@ -3385,7 +3476,7 @@
             <a:r>
               <a:rPr lang="en-US" sz="1400" dirty="0">
                 <a:solidFill>
-                  <a:srgbClr val="E6F3F7"/>
+                  <a:srgbClr val="DCE7FB"/>
                 </a:solidFill>
                 <a:latin typeface="Calibri" pitchFamily="34" charset="0"/>
                 <a:ea typeface="Calibri" pitchFamily="34" charset="-122"/>
@@ -3406,7 +3497,7 @@
             <a:r>
               <a:rPr lang="en-US" sz="1400" dirty="0">
                 <a:solidFill>
-                  <a:srgbClr val="E6F3F7"/>
+                  <a:srgbClr val="DCE7FB"/>
                 </a:solidFill>
                 <a:latin typeface="Calibri" pitchFamily="34" charset="0"/>
                 <a:ea typeface="Calibri" pitchFamily="34" charset="-122"/>
@@ -3420,6 +3511,151 @@
       </p:sp>
       <p:sp>
         <p:nvSpPr>
+          <p:cNvPr id="5" name="Text 3"/>
+          <p:cNvSpPr/>
+          <p:nvPr/>
+        </p:nvSpPr>
+        <p:spPr>
+          <a:xfrm>
+            <a:off x="6400800" y="1371600"/>
+            <a:ext cx="5486400" cy="365760"/>
+          </a:xfrm>
+          <a:prstGeom prst="rect">
+            <a:avLst/>
+          </a:prstGeom>
+          <a:noFill/>
+          <a:ln/>
+        </p:spPr>
+        <p:txBody>
+          <a:bodyPr wrap="square" lIns="0" tIns="0" rIns="0" bIns="0" rtlCol="0" anchor="ctr"/>
+          <a:lstStyle/>
+          <a:p>
+            <a:pPr indent="0" marL="0">
+              <a:buNone/>
+            </a:pPr>
+            <a:r>
+              <a:rPr lang="en-US" sz="1400" b="1" spc="200" kern="0" dirty="0">
+                <a:solidFill>
+                  <a:srgbClr val="8FB4FF"/>
+                </a:solidFill>
+                <a:latin typeface="Calibri" pitchFamily="34" charset="0"/>
+                <a:ea typeface="Calibri" pitchFamily="34" charset="-122"/>
+                <a:cs typeface="Calibri" pitchFamily="34" charset="-120"/>
+              </a:rPr>
+              <a:t>BƯỚC TIẾP THEO</a:t>
+            </a:r>
+            <a:endParaRPr lang="en-US" sz="1400" dirty="0"/>
+          </a:p>
+        </p:txBody>
+      </p:sp>
+      <p:sp>
+        <p:nvSpPr>
+          <p:cNvPr id="6" name="Text 4"/>
+          <p:cNvSpPr/>
+          <p:nvPr/>
+        </p:nvSpPr>
+        <p:spPr>
+          <a:xfrm>
+            <a:off x="6400800" y="1828800"/>
+            <a:ext cx="5212080" cy="3291840"/>
+          </a:xfrm>
+          <a:prstGeom prst="rect">
+            <a:avLst/>
+          </a:prstGeom>
+          <a:noFill/>
+          <a:ln/>
+        </p:spPr>
+        <p:txBody>
+          <a:bodyPr wrap="square" lIns="0" tIns="0" rIns="0" bIns="0" rtlCol="0" anchor="t"/>
+          <a:lstStyle/>
+          <a:p>
+            <a:pPr marL="342900" indent="-342900">
+              <a:spcAft>
+                <a:spcPts val="1000"/>
+              </a:spcAft>
+              <a:buSzPct val="100000"/>
+              <a:buChar char="•"/>
+            </a:pPr>
+            <a:r>
+              <a:rPr lang="en-US" sz="1400" dirty="0">
+                <a:solidFill>
+                  <a:srgbClr val="DCE7FB"/>
+                </a:solidFill>
+                <a:latin typeface="Calibri" pitchFamily="34" charset="0"/>
+                <a:ea typeface="Calibri" pitchFamily="34" charset="-122"/>
+                <a:cs typeface="Calibri" pitchFamily="34" charset="-120"/>
+              </a:rPr>
+              <a:t>Hoàn thiện design system (typography, spacing, icon set, component states)</a:t>
+            </a:r>
+            <a:endParaRPr lang="en-US" sz="1400" dirty="0"/>
+          </a:p>
+          <a:p>
+            <a:pPr marL="342900" indent="-342900">
+              <a:spcAft>
+                <a:spcPts val="1000"/>
+              </a:spcAft>
+              <a:buSzPct val="100000"/>
+              <a:buChar char="•"/>
+            </a:pPr>
+            <a:r>
+              <a:rPr lang="en-US" sz="1400" dirty="0">
+                <a:solidFill>
+                  <a:srgbClr val="DCE7FB"/>
+                </a:solidFill>
+                <a:latin typeface="Calibri" pitchFamily="34" charset="0"/>
+                <a:ea typeface="Calibri" pitchFamily="34" charset="-122"/>
+                <a:cs typeface="Calibri" pitchFamily="34" charset="-120"/>
+              </a:rPr>
+              <a:t>Wireframe: tab bar 4 nút · grid 4 trụ cột · template bài viết 3 giây</a:t>
+            </a:r>
+            <a:endParaRPr lang="en-US" sz="1400" dirty="0"/>
+          </a:p>
+          <a:p>
+            <a:pPr marL="342900" indent="-342900">
+              <a:spcAft>
+                <a:spcPts val="1000"/>
+              </a:spcAft>
+              <a:buSzPct val="100000"/>
+              <a:buChar char="•"/>
+            </a:pPr>
+            <a:r>
+              <a:rPr lang="en-US" sz="1400" dirty="0">
+                <a:solidFill>
+                  <a:srgbClr val="DCE7FB"/>
+                </a:solidFill>
+                <a:latin typeface="Calibri" pitchFamily="34" charset="0"/>
+                <a:ea typeface="Calibri" pitchFamily="34" charset="-122"/>
+                <a:cs typeface="Calibri" pitchFamily="34" charset="-120"/>
+              </a:rPr>
+              <a:t>Chốt AI Scope Matrix với đội ngũ y tế trước triển khai</a:t>
+            </a:r>
+            <a:endParaRPr lang="en-US" sz="1400" dirty="0"/>
+          </a:p>
+          <a:p>
+            <a:pPr marL="342900" indent="-342900">
+              <a:spcAft>
+                <a:spcPts val="1000"/>
+              </a:spcAft>
+              <a:buSzPct val="100000"/>
+              <a:buChar char="•"/>
+            </a:pPr>
+            <a:r>
+              <a:rPr lang="en-US" sz="1400" dirty="0">
+                <a:solidFill>
+                  <a:srgbClr val="DCE7FB"/>
+                </a:solidFill>
+                <a:latin typeface="Calibri" pitchFamily="34" charset="0"/>
+                <a:ea typeface="Calibri" pitchFamily="34" charset="-122"/>
+                <a:cs typeface="Calibri" pitchFamily="34" charset="-120"/>
+              </a:rPr>
+              <a:t>Bản bóc tách kỹ thuật sơ bộ cho buổi họp khách hàng</a:t>
+            </a:r>
+            <a:endParaRPr lang="en-US" sz="1400" dirty="0"/>
+          </a:p>
+        </p:txBody>
+      </p:sp>
+      <p:sp>
+        <p:nvSpPr>
           <p:cNvPr id="7" name="Shape 5"/>
           <p:cNvSpPr/>
           <p:nvPr/>
@@ -3435,18 +3671,11 @@
           <a:noFill/>
           <a:ln w="19050">
             <a:solidFill>
-              <a:srgbClr val="037B96"/>
+              <a:srgbClr val="1D4ED8"/>
             </a:solidFill>
             <a:prstDash val="solid"/>
           </a:ln>
         </p:spPr>
-        <p:txBody>
-          <a:bodyPr/>
-          <a:lstStyle/>
-          <a:p>
-            <a:endParaRPr lang="en-US"/>
-          </a:p>
-        </p:txBody>
       </p:sp>
       <p:sp>
         <p:nvSpPr>
@@ -3469,13 +3698,13 @@
           <a:bodyPr wrap="square" lIns="0" tIns="0" rIns="0" bIns="0" rtlCol="0" anchor="ctr"/>
           <a:lstStyle/>
           <a:p>
-            <a:pPr marL="0" indent="0" algn="ctr">
+            <a:pPr algn="ctr" indent="0" marL="0">
               <a:buNone/>
             </a:pPr>
             <a:r>
               <a:rPr lang="en-US" sz="1600" b="1" i="1" dirty="0">
                 <a:solidFill>
-                  <a:srgbClr val="82E6FD"/>
+                  <a:srgbClr val="8FB4FF"/>
                 </a:solidFill>
                 <a:latin typeface="Cambria" pitchFamily="34" charset="0"/>
                 <a:ea typeface="Cambria" pitchFamily="34" charset="-122"/>
@@ -3503,7 +3732,6 @@
         <a:solidFill>
           <a:srgbClr val="FFFFFF"/>
         </a:solidFill>
-        <a:effectLst/>
       </p:bgPr>
     </p:bg>
     <p:spTree>
@@ -3541,13 +3769,13 @@
           <a:bodyPr wrap="square" lIns="0" tIns="0" rIns="0" bIns="0" rtlCol="0" anchor="ctr"/>
           <a:lstStyle/>
           <a:p>
-            <a:pPr marL="0" indent="0" algn="l">
+            <a:pPr algn="l" indent="0" marL="0">
               <a:buNone/>
             </a:pPr>
             <a:r>
               <a:rPr lang="en-US" sz="3100" b="1" dirty="0">
                 <a:solidFill>
-                  <a:srgbClr val="012932"/>
+                  <a:srgbClr val="0A1E42"/>
                 </a:solidFill>
                 <a:latin typeface="Cambria" pitchFamily="34" charset="0"/>
                 <a:ea typeface="Cambria" pitchFamily="34" charset="-122"/>
@@ -3580,7 +3808,7 @@
           <a:bodyPr wrap="square" lIns="0" tIns="0" rIns="0" bIns="0" rtlCol="0" anchor="t"/>
           <a:lstStyle/>
           <a:p>
-            <a:pPr marL="0" indent="0">
+            <a:pPr indent="0" marL="0">
               <a:lnSpc>
                 <a:spcPct val="112000"/>
               </a:lnSpc>
@@ -3589,7 +3817,7 @@
             <a:r>
               <a:rPr lang="en-US" sz="1600" b="1" dirty="0">
                 <a:solidFill>
-                  <a:srgbClr val="012932"/>
+                  <a:srgbClr val="0A1E42"/>
                 </a:solidFill>
                 <a:latin typeface="Calibri" pitchFamily="34" charset="0"/>
                 <a:ea typeface="Calibri" pitchFamily="34" charset="-122"/>
@@ -3597,10 +3825,16 @@
               </a:rPr>
               <a:t>Website “làm chính trị”.  </a:t>
             </a:r>
+            <a:pPr indent="0" marL="0">
+              <a:lnSpc>
+                <a:spcPct val="112000"/>
+              </a:lnSpc>
+              <a:buNone/>
+            </a:pPr>
             <a:r>
               <a:rPr lang="en-US" sz="1600" dirty="0">
                 <a:solidFill>
-                  <a:srgbClr val="11333A"/>
+                  <a:srgbClr val="13223F"/>
                 </a:solidFill>
                 <a:latin typeface="Calibri" pitchFamily="34" charset="0"/>
                 <a:ea typeface="Calibri" pitchFamily="34" charset="-122"/>
@@ -3633,7 +3867,7 @@
           <a:bodyPr wrap="square" lIns="0" tIns="0" rIns="0" bIns="0" rtlCol="0" anchor="t"/>
           <a:lstStyle/>
           <a:p>
-            <a:pPr marL="0" indent="0">
+            <a:pPr indent="0" marL="0">
               <a:lnSpc>
                 <a:spcPct val="112000"/>
               </a:lnSpc>
@@ -3642,7 +3876,7 @@
             <a:r>
               <a:rPr lang="en-US" sz="1500" b="1" dirty="0">
                 <a:solidFill>
-                  <a:srgbClr val="037B96"/>
+                  <a:srgbClr val="1D4ED8"/>
                 </a:solidFill>
                 <a:latin typeface="Calibri" pitchFamily="34" charset="0"/>
                 <a:ea typeface="Calibri" pitchFamily="34" charset="-122"/>
@@ -3653,7 +3887,7 @@
             <a:endParaRPr lang="en-US" sz="1500" dirty="0"/>
           </a:p>
           <a:p>
-            <a:pPr marL="0" indent="0">
+            <a:pPr indent="0" marL="0">
               <a:lnSpc>
                 <a:spcPct val="112000"/>
               </a:lnSpc>
@@ -3662,7 +3896,7 @@
             <a:r>
               <a:rPr lang="en-US" sz="1500" dirty="0">
                 <a:solidFill>
-                  <a:srgbClr val="11333A"/>
+                  <a:srgbClr val="13223F"/>
                 </a:solidFill>
                 <a:latin typeface="Calibri" pitchFamily="34" charset="0"/>
                 <a:ea typeface="Calibri" pitchFamily="34" charset="-122"/>
@@ -3695,13 +3929,13 @@
           <a:bodyPr wrap="square" lIns="0" tIns="0" rIns="0" bIns="0" rtlCol="0" anchor="t"/>
           <a:lstStyle/>
           <a:p>
-            <a:pPr marL="0" indent="0">
+            <a:pPr indent="0" marL="0">
               <a:buNone/>
             </a:pPr>
             <a:r>
               <a:rPr lang="en-US" sz="1400" i="1" dirty="0">
                 <a:solidFill>
-                  <a:srgbClr val="5A6B70"/>
+                  <a:srgbClr val="5A6478"/>
                 </a:solidFill>
                 <a:latin typeface="Calibri" pitchFamily="34" charset="0"/>
                 <a:ea typeface="Calibri" pitchFamily="34" charset="-122"/>
@@ -3730,29 +3964,22 @@
             </a:avLst>
           </a:prstGeom>
           <a:solidFill>
-            <a:srgbClr val="EAF7FB"/>
+            <a:srgbClr val="EEF3FC"/>
           </a:solidFill>
           <a:ln w="12700">
             <a:solidFill>
-              <a:srgbClr val="D6E9EF"/>
+              <a:srgbClr val="DCE6F5"/>
             </a:solidFill>
             <a:prstDash val="solid"/>
           </a:ln>
           <a:effectLst>
-            <a:outerShdw blurRad="114300" dist="38100" dir="5400000" algn="bl" rotWithShape="0">
-              <a:srgbClr val="012932">
-                <a:alpha val="16000"/>
+            <a:outerShdw sx="100000" sy="100000" kx="0" ky="0" algn="bl" rotWithShape="0" blurRad="114300" dist="38100" dir="5400000">
+              <a:srgbClr val="0A1E42">
+                <a:alpha val="18000"/>
               </a:srgbClr>
             </a:outerShdw>
           </a:effectLst>
         </p:spPr>
-        <p:txBody>
-          <a:bodyPr/>
-          <a:lstStyle/>
-          <a:p>
-            <a:endParaRPr lang="en-US"/>
-          </a:p>
-        </p:txBody>
       </p:sp>
       <p:sp>
         <p:nvSpPr>
@@ -3775,13 +4002,13 @@
           <a:bodyPr wrap="square" lIns="0" tIns="0" rIns="0" bIns="0" rtlCol="0" anchor="ctr"/>
           <a:lstStyle/>
           <a:p>
-            <a:pPr marL="0" indent="0" algn="l">
+            <a:pPr algn="l" indent="0" marL="0">
               <a:buNone/>
             </a:pPr>
             <a:r>
               <a:rPr lang="en-US" sz="4200" b="1" dirty="0">
                 <a:solidFill>
-                  <a:srgbClr val="037B96"/>
+                  <a:srgbClr val="1D4ED8"/>
                 </a:solidFill>
                 <a:latin typeface="Cambria" pitchFamily="34" charset="0"/>
                 <a:ea typeface="Cambria" pitchFamily="34" charset="-122"/>
@@ -3814,13 +4041,13 @@
           <a:bodyPr wrap="square" lIns="0" tIns="0" rIns="0" bIns="0" rtlCol="0" anchor="ctr"/>
           <a:lstStyle/>
           <a:p>
-            <a:pPr marL="0" indent="0" algn="l">
+            <a:pPr algn="l" indent="0" marL="0">
               <a:buNone/>
             </a:pPr>
             <a:r>
               <a:rPr lang="en-US" sz="1400" dirty="0">
                 <a:solidFill>
-                  <a:srgbClr val="11333A"/>
+                  <a:srgbClr val="13223F"/>
                 </a:solidFill>
                 <a:latin typeface="Calibri" pitchFamily="34" charset="0"/>
                 <a:ea typeface="Calibri" pitchFamily="34" charset="-122"/>
@@ -3849,29 +4076,22 @@
             </a:avLst>
           </a:prstGeom>
           <a:solidFill>
-            <a:srgbClr val="EAF7FB"/>
+            <a:srgbClr val="EEF3FC"/>
           </a:solidFill>
           <a:ln w="12700">
             <a:solidFill>
-              <a:srgbClr val="D6E9EF"/>
+              <a:srgbClr val="DCE6F5"/>
             </a:solidFill>
             <a:prstDash val="solid"/>
           </a:ln>
           <a:effectLst>
-            <a:outerShdw blurRad="114300" dist="38100" dir="5400000" algn="bl" rotWithShape="0">
-              <a:srgbClr val="012932">
-                <a:alpha val="16000"/>
+            <a:outerShdw sx="100000" sy="100000" kx="0" ky="0" algn="bl" rotWithShape="0" blurRad="114300" dist="38100" dir="5400000">
+              <a:srgbClr val="0A1E42">
+                <a:alpha val="18000"/>
               </a:srgbClr>
             </a:outerShdw>
           </a:effectLst>
         </p:spPr>
-        <p:txBody>
-          <a:bodyPr/>
-          <a:lstStyle/>
-          <a:p>
-            <a:endParaRPr lang="en-US"/>
-          </a:p>
-        </p:txBody>
       </p:sp>
       <p:sp>
         <p:nvSpPr>
@@ -3894,13 +4114,13 @@
           <a:bodyPr wrap="square" lIns="0" tIns="0" rIns="0" bIns="0" rtlCol="0" anchor="ctr"/>
           <a:lstStyle/>
           <a:p>
-            <a:pPr marL="0" indent="0" algn="l">
+            <a:pPr algn="l" indent="0" marL="0">
               <a:buNone/>
             </a:pPr>
             <a:r>
               <a:rPr lang="en-US" sz="4200" b="1" dirty="0">
                 <a:solidFill>
-                  <a:srgbClr val="037B96"/>
+                  <a:srgbClr val="1D4ED8"/>
                 </a:solidFill>
                 <a:latin typeface="Cambria" pitchFamily="34" charset="0"/>
                 <a:ea typeface="Cambria" pitchFamily="34" charset="-122"/>
@@ -3933,13 +4153,13 @@
           <a:bodyPr wrap="square" lIns="0" tIns="0" rIns="0" bIns="0" rtlCol="0" anchor="ctr"/>
           <a:lstStyle/>
           <a:p>
-            <a:pPr marL="0" indent="0" algn="l">
+            <a:pPr algn="l" indent="0" marL="0">
               <a:buNone/>
             </a:pPr>
             <a:r>
               <a:rPr lang="en-US" sz="1400" dirty="0">
                 <a:solidFill>
-                  <a:srgbClr val="11333A"/>
+                  <a:srgbClr val="13223F"/>
                 </a:solidFill>
                 <a:latin typeface="Calibri" pitchFamily="34" charset="0"/>
                 <a:ea typeface="Calibri" pitchFamily="34" charset="-122"/>
@@ -3968,29 +4188,22 @@
             </a:avLst>
           </a:prstGeom>
           <a:solidFill>
-            <a:srgbClr val="EAF7FB"/>
+            <a:srgbClr val="EEF3FC"/>
           </a:solidFill>
           <a:ln w="12700">
             <a:solidFill>
-              <a:srgbClr val="D6E9EF"/>
+              <a:srgbClr val="DCE6F5"/>
             </a:solidFill>
             <a:prstDash val="solid"/>
           </a:ln>
           <a:effectLst>
-            <a:outerShdw blurRad="114300" dist="38100" dir="5400000" algn="bl" rotWithShape="0">
-              <a:srgbClr val="012932">
-                <a:alpha val="16000"/>
+            <a:outerShdw sx="100000" sy="100000" kx="0" ky="0" algn="bl" rotWithShape="0" blurRad="114300" dist="38100" dir="5400000">
+              <a:srgbClr val="0A1E42">
+                <a:alpha val="18000"/>
               </a:srgbClr>
             </a:outerShdw>
           </a:effectLst>
         </p:spPr>
-        <p:txBody>
-          <a:bodyPr/>
-          <a:lstStyle/>
-          <a:p>
-            <a:endParaRPr lang="en-US"/>
-          </a:p>
-        </p:txBody>
       </p:sp>
       <p:sp>
         <p:nvSpPr>
@@ -4013,13 +4226,13 @@
           <a:bodyPr wrap="square" lIns="0" tIns="0" rIns="0" bIns="0" rtlCol="0" anchor="ctr"/>
           <a:lstStyle/>
           <a:p>
-            <a:pPr marL="0" indent="0" algn="l">
+            <a:pPr algn="l" indent="0" marL="0">
               <a:buNone/>
             </a:pPr>
             <a:r>
               <a:rPr lang="en-US" sz="4200" b="1" dirty="0">
                 <a:solidFill>
-                  <a:srgbClr val="037B96"/>
+                  <a:srgbClr val="1D4ED8"/>
                 </a:solidFill>
                 <a:latin typeface="Cambria" pitchFamily="34" charset="0"/>
                 <a:ea typeface="Cambria" pitchFamily="34" charset="-122"/>
@@ -4052,13 +4265,13 @@
           <a:bodyPr wrap="square" lIns="0" tIns="0" rIns="0" bIns="0" rtlCol="0" anchor="ctr"/>
           <a:lstStyle/>
           <a:p>
-            <a:pPr marL="0" indent="0" algn="l">
+            <a:pPr algn="l" indent="0" marL="0">
               <a:buNone/>
             </a:pPr>
             <a:r>
               <a:rPr lang="en-US" sz="1400" dirty="0">
                 <a:solidFill>
-                  <a:srgbClr val="11333A"/>
+                  <a:srgbClr val="13223F"/>
                 </a:solidFill>
                 <a:latin typeface="Calibri" pitchFamily="34" charset="0"/>
                 <a:ea typeface="Calibri" pitchFamily="34" charset="-122"/>
@@ -4086,7 +4299,6 @@
         <a:solidFill>
           <a:srgbClr val="FFFFFF"/>
         </a:solidFill>
-        <a:effectLst/>
       </p:bgPr>
     </p:bg>
     <p:spTree>
@@ -4124,13 +4336,13 @@
           <a:bodyPr wrap="square" lIns="0" tIns="0" rIns="0" bIns="0" rtlCol="0" anchor="ctr"/>
           <a:lstStyle/>
           <a:p>
-            <a:pPr marL="0" indent="0" algn="l">
+            <a:pPr algn="l" indent="0" marL="0">
               <a:buNone/>
             </a:pPr>
             <a:r>
               <a:rPr lang="en-US" sz="3100" b="1" dirty="0">
                 <a:solidFill>
-                  <a:srgbClr val="012932"/>
+                  <a:srgbClr val="0A1E42"/>
                 </a:solidFill>
                 <a:latin typeface="Cambria" pitchFamily="34" charset="0"/>
                 <a:ea typeface="Cambria" pitchFamily="34" charset="-122"/>
@@ -4159,29 +4371,22 @@
             </a:avLst>
           </a:prstGeom>
           <a:solidFill>
-            <a:srgbClr val="EAF7FB"/>
+            <a:srgbClr val="EEF3FC"/>
           </a:solidFill>
           <a:ln w="12700">
             <a:solidFill>
-              <a:srgbClr val="D6E9EF"/>
+              <a:srgbClr val="DCE6F5"/>
             </a:solidFill>
             <a:prstDash val="solid"/>
           </a:ln>
           <a:effectLst>
-            <a:outerShdw blurRad="114300" dist="38100" dir="5400000" algn="bl" rotWithShape="0">
-              <a:srgbClr val="012932">
-                <a:alpha val="16000"/>
+            <a:outerShdw sx="100000" sy="100000" kx="0" ky="0" algn="bl" rotWithShape="0" blurRad="114300" dist="38100" dir="5400000">
+              <a:srgbClr val="0A1E42">
+                <a:alpha val="18000"/>
               </a:srgbClr>
             </a:outerShdw>
           </a:effectLst>
         </p:spPr>
-        <p:txBody>
-          <a:bodyPr/>
-          <a:lstStyle/>
-          <a:p>
-            <a:endParaRPr lang="en-US"/>
-          </a:p>
-        </p:txBody>
       </p:sp>
       <p:sp>
         <p:nvSpPr>
@@ -4198,22 +4403,15 @@
             <a:avLst/>
           </a:prstGeom>
           <a:solidFill>
-            <a:srgbClr val="012932"/>
+            <a:srgbClr val="0A1E42"/>
           </a:solidFill>
           <a:ln w="12700">
             <a:solidFill>
-              <a:srgbClr val="012932"/>
+              <a:srgbClr val="0A1E42"/>
             </a:solidFill>
             <a:prstDash val="solid"/>
           </a:ln>
         </p:spPr>
-        <p:txBody>
-          <a:bodyPr/>
-          <a:lstStyle/>
-          <a:p>
-            <a:endParaRPr lang="en-US"/>
-          </a:p>
-        </p:txBody>
       </p:sp>
       <p:sp>
         <p:nvSpPr>
@@ -4236,7 +4434,7 @@
           <a:bodyPr wrap="square" lIns="0" tIns="0" rIns="0" bIns="0" rtlCol="0" anchor="ctr"/>
           <a:lstStyle/>
           <a:p>
-            <a:pPr marL="0" indent="0" algn="ctr">
+            <a:pPr algn="ctr" indent="0" marL="0">
               <a:buNone/>
             </a:pPr>
             <a:r>
@@ -4275,13 +4473,13 @@
           <a:bodyPr wrap="square" lIns="0" tIns="0" rIns="0" bIns="0" rtlCol="0" anchor="ctr"/>
           <a:lstStyle/>
           <a:p>
-            <a:pPr marL="0" indent="0">
+            <a:pPr indent="0" marL="0">
               <a:buNone/>
             </a:pPr>
             <a:r>
               <a:rPr lang="en-US" sz="2000" b="1" dirty="0">
                 <a:solidFill>
-                  <a:srgbClr val="012932"/>
+                  <a:srgbClr val="0A1E42"/>
                 </a:solidFill>
                 <a:latin typeface="Cambria" pitchFamily="34" charset="0"/>
                 <a:ea typeface="Cambria" pitchFamily="34" charset="-122"/>
@@ -4314,7 +4512,7 @@
           <a:bodyPr wrap="square" lIns="0" tIns="0" rIns="0" bIns="0" rtlCol="0" anchor="t"/>
           <a:lstStyle/>
           <a:p>
-            <a:pPr marL="0" indent="0">
+            <a:pPr indent="0" marL="0">
               <a:lnSpc>
                 <a:spcPct val="110000"/>
               </a:lnSpc>
@@ -4323,7 +4521,7 @@
             <a:r>
               <a:rPr lang="en-US" sz="1400" dirty="0">
                 <a:solidFill>
-                  <a:srgbClr val="11333A"/>
+                  <a:srgbClr val="13223F"/>
                 </a:solidFill>
                 <a:latin typeface="Calibri" pitchFamily="34" charset="0"/>
                 <a:ea typeface="Calibri" pitchFamily="34" charset="-122"/>
@@ -4352,29 +4550,22 @@
             </a:avLst>
           </a:prstGeom>
           <a:solidFill>
-            <a:srgbClr val="EAF7FB"/>
+            <a:srgbClr val="EEF3FC"/>
           </a:solidFill>
           <a:ln w="12700">
             <a:solidFill>
-              <a:srgbClr val="D6E9EF"/>
+              <a:srgbClr val="DCE6F5"/>
             </a:solidFill>
             <a:prstDash val="solid"/>
           </a:ln>
           <a:effectLst>
-            <a:outerShdw blurRad="114300" dist="38100" dir="5400000" algn="bl" rotWithShape="0">
-              <a:srgbClr val="012932">
-                <a:alpha val="16000"/>
+            <a:outerShdw sx="100000" sy="100000" kx="0" ky="0" algn="bl" rotWithShape="0" blurRad="114300" dist="38100" dir="5400000">
+              <a:srgbClr val="0A1E42">
+                <a:alpha val="18000"/>
               </a:srgbClr>
             </a:outerShdw>
           </a:effectLst>
         </p:spPr>
-        <p:txBody>
-          <a:bodyPr/>
-          <a:lstStyle/>
-          <a:p>
-            <a:endParaRPr lang="en-US"/>
-          </a:p>
-        </p:txBody>
       </p:sp>
       <p:sp>
         <p:nvSpPr>
@@ -4391,22 +4582,15 @@
             <a:avLst/>
           </a:prstGeom>
           <a:solidFill>
-            <a:srgbClr val="037B96"/>
+            <a:srgbClr val="1D4ED8"/>
           </a:solidFill>
           <a:ln w="12700">
             <a:solidFill>
-              <a:srgbClr val="037B96"/>
+              <a:srgbClr val="1D4ED8"/>
             </a:solidFill>
             <a:prstDash val="solid"/>
           </a:ln>
         </p:spPr>
-        <p:txBody>
-          <a:bodyPr/>
-          <a:lstStyle/>
-          <a:p>
-            <a:endParaRPr lang="en-US"/>
-          </a:p>
-        </p:txBody>
       </p:sp>
       <p:sp>
         <p:nvSpPr>
@@ -4429,7 +4613,7 @@
           <a:bodyPr wrap="square" lIns="0" tIns="0" rIns="0" bIns="0" rtlCol="0" anchor="ctr"/>
           <a:lstStyle/>
           <a:p>
-            <a:pPr marL="0" indent="0" algn="ctr">
+            <a:pPr algn="ctr" indent="0" marL="0">
               <a:buNone/>
             </a:pPr>
             <a:r>
@@ -4468,13 +4652,13 @@
           <a:bodyPr wrap="square" lIns="0" tIns="0" rIns="0" bIns="0" rtlCol="0" anchor="ctr"/>
           <a:lstStyle/>
           <a:p>
-            <a:pPr marL="0" indent="0">
+            <a:pPr indent="0" marL="0">
               <a:buNone/>
             </a:pPr>
             <a:r>
               <a:rPr lang="en-US" sz="2000" b="1" dirty="0">
                 <a:solidFill>
-                  <a:srgbClr val="037B96"/>
+                  <a:srgbClr val="1D4ED8"/>
                 </a:solidFill>
                 <a:latin typeface="Cambria" pitchFamily="34" charset="0"/>
                 <a:ea typeface="Cambria" pitchFamily="34" charset="-122"/>
@@ -4507,7 +4691,7 @@
           <a:bodyPr wrap="square" lIns="0" tIns="0" rIns="0" bIns="0" rtlCol="0" anchor="t"/>
           <a:lstStyle/>
           <a:p>
-            <a:pPr marL="0" indent="0">
+            <a:pPr indent="0" marL="0">
               <a:lnSpc>
                 <a:spcPct val="110000"/>
               </a:lnSpc>
@@ -4516,7 +4700,7 @@
             <a:r>
               <a:rPr lang="en-US" sz="1400" dirty="0">
                 <a:solidFill>
-                  <a:srgbClr val="11333A"/>
+                  <a:srgbClr val="13223F"/>
                 </a:solidFill>
                 <a:latin typeface="Calibri" pitchFamily="34" charset="0"/>
                 <a:ea typeface="Calibri" pitchFamily="34" charset="-122"/>
@@ -4545,29 +4729,22 @@
             </a:avLst>
           </a:prstGeom>
           <a:solidFill>
-            <a:srgbClr val="EAF7FB"/>
+            <a:srgbClr val="EEF3FC"/>
           </a:solidFill>
           <a:ln w="12700">
             <a:solidFill>
-              <a:srgbClr val="D6E9EF"/>
+              <a:srgbClr val="DCE6F5"/>
             </a:solidFill>
             <a:prstDash val="solid"/>
           </a:ln>
           <a:effectLst>
-            <a:outerShdw blurRad="114300" dist="38100" dir="5400000" algn="bl" rotWithShape="0">
-              <a:srgbClr val="012932">
-                <a:alpha val="16000"/>
+            <a:outerShdw sx="100000" sy="100000" kx="0" ky="0" algn="bl" rotWithShape="0" blurRad="114300" dist="38100" dir="5400000">
+              <a:srgbClr val="0A1E42">
+                <a:alpha val="18000"/>
               </a:srgbClr>
             </a:outerShdw>
           </a:effectLst>
         </p:spPr>
-        <p:txBody>
-          <a:bodyPr/>
-          <a:lstStyle/>
-          <a:p>
-            <a:endParaRPr lang="en-US"/>
-          </a:p>
-        </p:txBody>
       </p:sp>
       <p:sp>
         <p:nvSpPr>
@@ -4584,22 +4761,15 @@
             <a:avLst/>
           </a:prstGeom>
           <a:solidFill>
-            <a:srgbClr val="037B96"/>
+            <a:srgbClr val="1D4ED8"/>
           </a:solidFill>
           <a:ln w="12700">
             <a:solidFill>
-              <a:srgbClr val="037B96"/>
+              <a:srgbClr val="1D4ED8"/>
             </a:solidFill>
             <a:prstDash val="solid"/>
           </a:ln>
         </p:spPr>
-        <p:txBody>
-          <a:bodyPr/>
-          <a:lstStyle/>
-          <a:p>
-            <a:endParaRPr lang="en-US"/>
-          </a:p>
-        </p:txBody>
       </p:sp>
       <p:sp>
         <p:nvSpPr>
@@ -4622,7 +4792,7 @@
           <a:bodyPr wrap="square" lIns="0" tIns="0" rIns="0" bIns="0" rtlCol="0" anchor="ctr"/>
           <a:lstStyle/>
           <a:p>
-            <a:pPr marL="0" indent="0" algn="ctr">
+            <a:pPr algn="ctr" indent="0" marL="0">
               <a:buNone/>
             </a:pPr>
             <a:r>
@@ -4661,13 +4831,13 @@
           <a:bodyPr wrap="square" lIns="0" tIns="0" rIns="0" bIns="0" rtlCol="0" anchor="ctr"/>
           <a:lstStyle/>
           <a:p>
-            <a:pPr marL="0" indent="0">
+            <a:pPr indent="0" marL="0">
               <a:buNone/>
             </a:pPr>
             <a:r>
               <a:rPr lang="en-US" sz="2000" b="1" dirty="0">
                 <a:solidFill>
-                  <a:srgbClr val="037B96"/>
+                  <a:srgbClr val="1D4ED8"/>
                 </a:solidFill>
                 <a:latin typeface="Cambria" pitchFamily="34" charset="0"/>
                 <a:ea typeface="Cambria" pitchFamily="34" charset="-122"/>
@@ -4700,7 +4870,7 @@
           <a:bodyPr wrap="square" lIns="0" tIns="0" rIns="0" bIns="0" rtlCol="0" anchor="t"/>
           <a:lstStyle/>
           <a:p>
-            <a:pPr marL="0" indent="0">
+            <a:pPr indent="0" marL="0">
               <a:lnSpc>
                 <a:spcPct val="110000"/>
               </a:lnSpc>
@@ -4709,7 +4879,7 @@
             <a:r>
               <a:rPr lang="en-US" sz="1400" dirty="0">
                 <a:solidFill>
-                  <a:srgbClr val="11333A"/>
+                  <a:srgbClr val="13223F"/>
                 </a:solidFill>
                 <a:latin typeface="Calibri" pitchFamily="34" charset="0"/>
                 <a:ea typeface="Calibri" pitchFamily="34" charset="-122"/>
@@ -4738,29 +4908,22 @@
             </a:avLst>
           </a:prstGeom>
           <a:solidFill>
-            <a:srgbClr val="EAF7FB"/>
+            <a:srgbClr val="EEF3FC"/>
           </a:solidFill>
           <a:ln w="12700">
             <a:solidFill>
-              <a:srgbClr val="D6E9EF"/>
+              <a:srgbClr val="DCE6F5"/>
             </a:solidFill>
             <a:prstDash val="solid"/>
           </a:ln>
           <a:effectLst>
-            <a:outerShdw blurRad="114300" dist="38100" dir="5400000" algn="bl" rotWithShape="0">
-              <a:srgbClr val="012932">
-                <a:alpha val="16000"/>
+            <a:outerShdw sx="100000" sy="100000" kx="0" ky="0" algn="bl" rotWithShape="0" blurRad="114300" dist="38100" dir="5400000">
+              <a:srgbClr val="0A1E42">
+                <a:alpha val="18000"/>
               </a:srgbClr>
             </a:outerShdw>
           </a:effectLst>
         </p:spPr>
-        <p:txBody>
-          <a:bodyPr/>
-          <a:lstStyle/>
-          <a:p>
-            <a:endParaRPr lang="en-US"/>
-          </a:p>
-        </p:txBody>
       </p:sp>
       <p:sp>
         <p:nvSpPr>
@@ -4777,22 +4940,15 @@
             <a:avLst/>
           </a:prstGeom>
           <a:solidFill>
-            <a:srgbClr val="012932"/>
+            <a:srgbClr val="0A1E42"/>
           </a:solidFill>
           <a:ln w="12700">
             <a:solidFill>
-              <a:srgbClr val="012932"/>
+              <a:srgbClr val="0A1E42"/>
             </a:solidFill>
             <a:prstDash val="solid"/>
           </a:ln>
         </p:spPr>
-        <p:txBody>
-          <a:bodyPr/>
-          <a:lstStyle/>
-          <a:p>
-            <a:endParaRPr lang="en-US"/>
-          </a:p>
-        </p:txBody>
       </p:sp>
       <p:sp>
         <p:nvSpPr>
@@ -4815,7 +4971,7 @@
           <a:bodyPr wrap="square" lIns="0" tIns="0" rIns="0" bIns="0" rtlCol="0" anchor="ctr"/>
           <a:lstStyle/>
           <a:p>
-            <a:pPr marL="0" indent="0" algn="ctr">
+            <a:pPr algn="ctr" indent="0" marL="0">
               <a:buNone/>
             </a:pPr>
             <a:r>
@@ -4854,13 +5010,13 @@
           <a:bodyPr wrap="square" lIns="0" tIns="0" rIns="0" bIns="0" rtlCol="0" anchor="ctr"/>
           <a:lstStyle/>
           <a:p>
-            <a:pPr marL="0" indent="0">
+            <a:pPr indent="0" marL="0">
               <a:buNone/>
             </a:pPr>
             <a:r>
               <a:rPr lang="en-US" sz="2000" b="1" dirty="0">
                 <a:solidFill>
-                  <a:srgbClr val="012932"/>
+                  <a:srgbClr val="0A1E42"/>
                 </a:solidFill>
                 <a:latin typeface="Cambria" pitchFamily="34" charset="0"/>
                 <a:ea typeface="Cambria" pitchFamily="34" charset="-122"/>
@@ -4893,7 +5049,7 @@
           <a:bodyPr wrap="square" lIns="0" tIns="0" rIns="0" bIns="0" rtlCol="0" anchor="t"/>
           <a:lstStyle/>
           <a:p>
-            <a:pPr marL="0" indent="0">
+            <a:pPr indent="0" marL="0">
               <a:lnSpc>
                 <a:spcPct val="110000"/>
               </a:lnSpc>
@@ -4902,7 +5058,7 @@
             <a:r>
               <a:rPr lang="en-US" sz="1400" dirty="0">
                 <a:solidFill>
-                  <a:srgbClr val="11333A"/>
+                  <a:srgbClr val="13223F"/>
                 </a:solidFill>
                 <a:latin typeface="Calibri" pitchFamily="34" charset="0"/>
                 <a:ea typeface="Calibri" pitchFamily="34" charset="-122"/>
@@ -4930,7 +5086,6 @@
         <a:solidFill>
           <a:srgbClr val="FFFFFF"/>
         </a:solidFill>
-        <a:effectLst/>
       </p:bgPr>
     </p:bg>
     <p:spTree>
@@ -4968,13 +5123,13 @@
           <a:bodyPr wrap="square" lIns="0" tIns="0" rIns="0" bIns="0" rtlCol="0" anchor="ctr"/>
           <a:lstStyle/>
           <a:p>
-            <a:pPr marL="0" indent="0" algn="l">
+            <a:pPr algn="l" indent="0" marL="0">
               <a:buNone/>
             </a:pPr>
             <a:r>
               <a:rPr lang="en-US" sz="3100" b="1" dirty="0">
                 <a:solidFill>
-                  <a:srgbClr val="012932"/>
+                  <a:srgbClr val="0A1E42"/>
                 </a:solidFill>
                 <a:latin typeface="Cambria" pitchFamily="34" charset="0"/>
                 <a:ea typeface="Cambria" pitchFamily="34" charset="-122"/>
@@ -5001,22 +5156,15 @@
             <a:avLst/>
           </a:prstGeom>
           <a:solidFill>
-            <a:srgbClr val="012932"/>
+            <a:srgbClr val="0A1E42"/>
           </a:solidFill>
           <a:ln w="12700">
             <a:solidFill>
-              <a:srgbClr val="012932"/>
+              <a:srgbClr val="0A1E42"/>
             </a:solidFill>
             <a:prstDash val="solid"/>
           </a:ln>
         </p:spPr>
-        <p:txBody>
-          <a:bodyPr/>
-          <a:lstStyle/>
-          <a:p>
-            <a:endParaRPr lang="en-US"/>
-          </a:p>
-        </p:txBody>
       </p:sp>
       <p:sp>
         <p:nvSpPr>
@@ -5039,7 +5187,7 @@
           <a:bodyPr wrap="square" lIns="0" tIns="0" rIns="0" bIns="0" rtlCol="0" anchor="ctr"/>
           <a:lstStyle/>
           <a:p>
-            <a:pPr marL="0" indent="0" algn="ctr">
+            <a:pPr algn="ctr" indent="0" marL="0">
               <a:buNone/>
             </a:pPr>
             <a:r>
@@ -5078,13 +5226,13 @@
           <a:bodyPr wrap="square" lIns="0" tIns="0" rIns="0" bIns="0" rtlCol="0" anchor="ctr"/>
           <a:lstStyle/>
           <a:p>
-            <a:pPr marL="0" indent="0">
+            <a:pPr indent="0" marL="0">
               <a:buNone/>
             </a:pPr>
             <a:r>
               <a:rPr lang="en-US" sz="1800" b="1" dirty="0">
                 <a:solidFill>
-                  <a:srgbClr val="012932"/>
+                  <a:srgbClr val="0A1E42"/>
                 </a:solidFill>
                 <a:latin typeface="Cambria" pitchFamily="34" charset="0"/>
                 <a:ea typeface="Cambria" pitchFamily="34" charset="-122"/>
@@ -5117,7 +5265,7 @@
           <a:bodyPr wrap="square" lIns="0" tIns="0" rIns="0" bIns="0" rtlCol="0" anchor="ctr"/>
           <a:lstStyle/>
           <a:p>
-            <a:pPr marL="0" indent="0">
+            <a:pPr indent="0" marL="0">
               <a:lnSpc>
                 <a:spcPct val="102000"/>
               </a:lnSpc>
@@ -5126,7 +5274,7 @@
             <a:r>
               <a:rPr lang="en-US" sz="1350" dirty="0">
                 <a:solidFill>
-                  <a:srgbClr val="11333A"/>
+                  <a:srgbClr val="13223F"/>
                 </a:solidFill>
                 <a:latin typeface="Calibri" pitchFamily="34" charset="0"/>
                 <a:ea typeface="Calibri" pitchFamily="34" charset="-122"/>
@@ -5155,29 +5303,22 @@
             </a:avLst>
           </a:prstGeom>
           <a:solidFill>
-            <a:srgbClr val="EAF7FB"/>
+            <a:srgbClr val="EEF3FC"/>
           </a:solidFill>
           <a:ln w="12700">
             <a:solidFill>
-              <a:srgbClr val="D6E9EF"/>
+              <a:srgbClr val="DCE6F5"/>
             </a:solidFill>
             <a:prstDash val="solid"/>
           </a:ln>
           <a:effectLst>
-            <a:outerShdw blurRad="114300" dist="38100" dir="5400000" algn="bl" rotWithShape="0">
-              <a:srgbClr val="012932">
-                <a:alpha val="16000"/>
+            <a:outerShdw sx="100000" sy="100000" kx="0" ky="0" algn="bl" rotWithShape="0" blurRad="114300" dist="38100" dir="5400000">
+              <a:srgbClr val="0A1E42">
+                <a:alpha val="18000"/>
               </a:srgbClr>
             </a:outerShdw>
           </a:effectLst>
         </p:spPr>
-        <p:txBody>
-          <a:bodyPr/>
-          <a:lstStyle/>
-          <a:p>
-            <a:endParaRPr lang="en-US"/>
-          </a:p>
-        </p:txBody>
       </p:sp>
       <p:sp>
         <p:nvSpPr>
@@ -5200,13 +5341,13 @@
           <a:bodyPr wrap="square" lIns="0" tIns="0" rIns="0" bIns="0" rtlCol="0" anchor="ctr"/>
           <a:lstStyle/>
           <a:p>
-            <a:pPr marL="0" indent="0" algn="ctr">
+            <a:pPr algn="ctr" indent="0" marL="0">
               <a:buNone/>
             </a:pPr>
             <a:r>
               <a:rPr lang="en-US" sz="1150" b="1" i="1" dirty="0">
                 <a:solidFill>
-                  <a:srgbClr val="037B96"/>
+                  <a:srgbClr val="1D4ED8"/>
                 </a:solidFill>
                 <a:latin typeface="Calibri" pitchFamily="34" charset="0"/>
                 <a:ea typeface="Calibri" pitchFamily="34" charset="-122"/>
@@ -5233,22 +5374,15 @@
             <a:avLst/>
           </a:prstGeom>
           <a:solidFill>
-            <a:srgbClr val="037B96"/>
+            <a:srgbClr val="1D4ED8"/>
           </a:solidFill>
           <a:ln w="12700">
             <a:solidFill>
-              <a:srgbClr val="037B96"/>
+              <a:srgbClr val="1D4ED8"/>
             </a:solidFill>
             <a:prstDash val="solid"/>
           </a:ln>
         </p:spPr>
-        <p:txBody>
-          <a:bodyPr/>
-          <a:lstStyle/>
-          <a:p>
-            <a:endParaRPr lang="en-US"/>
-          </a:p>
-        </p:txBody>
       </p:sp>
       <p:sp>
         <p:nvSpPr>
@@ -5271,7 +5405,7 @@
           <a:bodyPr wrap="square" lIns="0" tIns="0" rIns="0" bIns="0" rtlCol="0" anchor="ctr"/>
           <a:lstStyle/>
           <a:p>
-            <a:pPr marL="0" indent="0" algn="ctr">
+            <a:pPr algn="ctr" indent="0" marL="0">
               <a:buNone/>
             </a:pPr>
             <a:r>
@@ -5310,13 +5444,13 @@
           <a:bodyPr wrap="square" lIns="0" tIns="0" rIns="0" bIns="0" rtlCol="0" anchor="ctr"/>
           <a:lstStyle/>
           <a:p>
-            <a:pPr marL="0" indent="0">
+            <a:pPr indent="0" marL="0">
               <a:buNone/>
             </a:pPr>
             <a:r>
               <a:rPr lang="en-US" sz="1800" b="1" dirty="0">
                 <a:solidFill>
-                  <a:srgbClr val="012932"/>
+                  <a:srgbClr val="0A1E42"/>
                 </a:solidFill>
                 <a:latin typeface="Cambria" pitchFamily="34" charset="0"/>
                 <a:ea typeface="Cambria" pitchFamily="34" charset="-122"/>
@@ -5349,7 +5483,7 @@
           <a:bodyPr wrap="square" lIns="0" tIns="0" rIns="0" bIns="0" rtlCol="0" anchor="ctr"/>
           <a:lstStyle/>
           <a:p>
-            <a:pPr marL="0" indent="0">
+            <a:pPr indent="0" marL="0">
               <a:lnSpc>
                 <a:spcPct val="102000"/>
               </a:lnSpc>
@@ -5358,7 +5492,7 @@
             <a:r>
               <a:rPr lang="en-US" sz="1350" dirty="0">
                 <a:solidFill>
-                  <a:srgbClr val="11333A"/>
+                  <a:srgbClr val="13223F"/>
                 </a:solidFill>
                 <a:latin typeface="Calibri" pitchFamily="34" charset="0"/>
                 <a:ea typeface="Calibri" pitchFamily="34" charset="-122"/>
@@ -5387,29 +5521,22 @@
             </a:avLst>
           </a:prstGeom>
           <a:solidFill>
-            <a:srgbClr val="EAF7FB"/>
+            <a:srgbClr val="EEF3FC"/>
           </a:solidFill>
           <a:ln w="12700">
             <a:solidFill>
-              <a:srgbClr val="D6E9EF"/>
+              <a:srgbClr val="DCE6F5"/>
             </a:solidFill>
             <a:prstDash val="solid"/>
           </a:ln>
           <a:effectLst>
-            <a:outerShdw blurRad="114300" dist="38100" dir="5400000" algn="bl" rotWithShape="0">
-              <a:srgbClr val="012932">
-                <a:alpha val="16000"/>
+            <a:outerShdw sx="100000" sy="100000" kx="0" ky="0" algn="bl" rotWithShape="0" blurRad="114300" dist="38100" dir="5400000">
+              <a:srgbClr val="0A1E42">
+                <a:alpha val="18000"/>
               </a:srgbClr>
             </a:outerShdw>
           </a:effectLst>
         </p:spPr>
-        <p:txBody>
-          <a:bodyPr/>
-          <a:lstStyle/>
-          <a:p>
-            <a:endParaRPr lang="en-US"/>
-          </a:p>
-        </p:txBody>
       </p:sp>
       <p:sp>
         <p:nvSpPr>
@@ -5432,13 +5559,13 @@
           <a:bodyPr wrap="square" lIns="0" tIns="0" rIns="0" bIns="0" rtlCol="0" anchor="ctr"/>
           <a:lstStyle/>
           <a:p>
-            <a:pPr marL="0" indent="0" algn="ctr">
+            <a:pPr algn="ctr" indent="0" marL="0">
               <a:buNone/>
             </a:pPr>
             <a:r>
               <a:rPr lang="en-US" sz="1150" b="1" i="1" dirty="0">
                 <a:solidFill>
-                  <a:srgbClr val="037B96"/>
+                  <a:srgbClr val="1D4ED8"/>
                 </a:solidFill>
                 <a:latin typeface="Calibri" pitchFamily="34" charset="0"/>
                 <a:ea typeface="Calibri" pitchFamily="34" charset="-122"/>
@@ -5465,22 +5592,15 @@
             <a:avLst/>
           </a:prstGeom>
           <a:solidFill>
-            <a:srgbClr val="012932"/>
+            <a:srgbClr val="0A1E42"/>
           </a:solidFill>
           <a:ln w="12700">
             <a:solidFill>
-              <a:srgbClr val="012932"/>
+              <a:srgbClr val="0A1E42"/>
             </a:solidFill>
             <a:prstDash val="solid"/>
           </a:ln>
         </p:spPr>
-        <p:txBody>
-          <a:bodyPr/>
-          <a:lstStyle/>
-          <a:p>
-            <a:endParaRPr lang="en-US"/>
-          </a:p>
-        </p:txBody>
       </p:sp>
       <p:sp>
         <p:nvSpPr>
@@ -5503,7 +5623,7 @@
           <a:bodyPr wrap="square" lIns="0" tIns="0" rIns="0" bIns="0" rtlCol="0" anchor="ctr"/>
           <a:lstStyle/>
           <a:p>
-            <a:pPr marL="0" indent="0" algn="ctr">
+            <a:pPr algn="ctr" indent="0" marL="0">
               <a:buNone/>
             </a:pPr>
             <a:r>
@@ -5542,13 +5662,13 @@
           <a:bodyPr wrap="square" lIns="0" tIns="0" rIns="0" bIns="0" rtlCol="0" anchor="ctr"/>
           <a:lstStyle/>
           <a:p>
-            <a:pPr marL="0" indent="0">
+            <a:pPr indent="0" marL="0">
               <a:buNone/>
             </a:pPr>
             <a:r>
               <a:rPr lang="en-US" sz="1800" b="1" dirty="0">
                 <a:solidFill>
-                  <a:srgbClr val="012932"/>
+                  <a:srgbClr val="0A1E42"/>
                 </a:solidFill>
                 <a:latin typeface="Cambria" pitchFamily="34" charset="0"/>
                 <a:ea typeface="Cambria" pitchFamily="34" charset="-122"/>
@@ -5581,7 +5701,7 @@
           <a:bodyPr wrap="square" lIns="0" tIns="0" rIns="0" bIns="0" rtlCol="0" anchor="ctr"/>
           <a:lstStyle/>
           <a:p>
-            <a:pPr marL="0" indent="0">
+            <a:pPr indent="0" marL="0">
               <a:lnSpc>
                 <a:spcPct val="102000"/>
               </a:lnSpc>
@@ -5590,7 +5710,7 @@
             <a:r>
               <a:rPr lang="en-US" sz="1350" dirty="0">
                 <a:solidFill>
-                  <a:srgbClr val="11333A"/>
+                  <a:srgbClr val="13223F"/>
                 </a:solidFill>
                 <a:latin typeface="Calibri" pitchFamily="34" charset="0"/>
                 <a:ea typeface="Calibri" pitchFamily="34" charset="-122"/>
@@ -5619,29 +5739,22 @@
             </a:avLst>
           </a:prstGeom>
           <a:solidFill>
-            <a:srgbClr val="EAF7FB"/>
+            <a:srgbClr val="EEF3FC"/>
           </a:solidFill>
           <a:ln w="12700">
             <a:solidFill>
-              <a:srgbClr val="D6E9EF"/>
+              <a:srgbClr val="DCE6F5"/>
             </a:solidFill>
             <a:prstDash val="solid"/>
           </a:ln>
           <a:effectLst>
-            <a:outerShdw blurRad="114300" dist="38100" dir="5400000" algn="bl" rotWithShape="0">
-              <a:srgbClr val="012932">
-                <a:alpha val="16000"/>
+            <a:outerShdw sx="100000" sy="100000" kx="0" ky="0" algn="bl" rotWithShape="0" blurRad="114300" dist="38100" dir="5400000">
+              <a:srgbClr val="0A1E42">
+                <a:alpha val="18000"/>
               </a:srgbClr>
             </a:outerShdw>
           </a:effectLst>
         </p:spPr>
-        <p:txBody>
-          <a:bodyPr/>
-          <a:lstStyle/>
-          <a:p>
-            <a:endParaRPr lang="en-US"/>
-          </a:p>
-        </p:txBody>
       </p:sp>
       <p:sp>
         <p:nvSpPr>
@@ -5664,13 +5777,13 @@
           <a:bodyPr wrap="square" lIns="0" tIns="0" rIns="0" bIns="0" rtlCol="0" anchor="ctr"/>
           <a:lstStyle/>
           <a:p>
-            <a:pPr marL="0" indent="0" algn="ctr">
+            <a:pPr algn="ctr" indent="0" marL="0">
               <a:buNone/>
             </a:pPr>
             <a:r>
               <a:rPr lang="en-US" sz="1150" b="1" i="1" dirty="0">
                 <a:solidFill>
-                  <a:srgbClr val="037B96"/>
+                  <a:srgbClr val="1D4ED8"/>
                 </a:solidFill>
                 <a:latin typeface="Calibri" pitchFamily="34" charset="0"/>
                 <a:ea typeface="Calibri" pitchFamily="34" charset="-122"/>
@@ -5697,22 +5810,15 @@
             <a:avLst/>
           </a:prstGeom>
           <a:solidFill>
-            <a:srgbClr val="037B96"/>
+            <a:srgbClr val="1D4ED8"/>
           </a:solidFill>
           <a:ln w="12700">
             <a:solidFill>
-              <a:srgbClr val="037B96"/>
+              <a:srgbClr val="1D4ED8"/>
             </a:solidFill>
             <a:prstDash val="solid"/>
           </a:ln>
         </p:spPr>
-        <p:txBody>
-          <a:bodyPr/>
-          <a:lstStyle/>
-          <a:p>
-            <a:endParaRPr lang="en-US"/>
-          </a:p>
-        </p:txBody>
       </p:sp>
       <p:sp>
         <p:nvSpPr>
@@ -5735,7 +5841,7 @@
           <a:bodyPr wrap="square" lIns="0" tIns="0" rIns="0" bIns="0" rtlCol="0" anchor="ctr"/>
           <a:lstStyle/>
           <a:p>
-            <a:pPr marL="0" indent="0" algn="ctr">
+            <a:pPr algn="ctr" indent="0" marL="0">
               <a:buNone/>
             </a:pPr>
             <a:r>
@@ -5774,13 +5880,13 @@
           <a:bodyPr wrap="square" lIns="0" tIns="0" rIns="0" bIns="0" rtlCol="0" anchor="ctr"/>
           <a:lstStyle/>
           <a:p>
-            <a:pPr marL="0" indent="0">
+            <a:pPr indent="0" marL="0">
               <a:buNone/>
             </a:pPr>
             <a:r>
               <a:rPr lang="en-US" sz="1800" b="1" dirty="0">
                 <a:solidFill>
-                  <a:srgbClr val="012932"/>
+                  <a:srgbClr val="0A1E42"/>
                 </a:solidFill>
                 <a:latin typeface="Cambria" pitchFamily="34" charset="0"/>
                 <a:ea typeface="Cambria" pitchFamily="34" charset="-122"/>
@@ -5813,7 +5919,7 @@
           <a:bodyPr wrap="square" lIns="0" tIns="0" rIns="0" bIns="0" rtlCol="0" anchor="ctr"/>
           <a:lstStyle/>
           <a:p>
-            <a:pPr marL="0" indent="0">
+            <a:pPr indent="0" marL="0">
               <a:lnSpc>
                 <a:spcPct val="102000"/>
               </a:lnSpc>
@@ -5822,7 +5928,7 @@
             <a:r>
               <a:rPr lang="en-US" sz="1350" dirty="0">
                 <a:solidFill>
-                  <a:srgbClr val="11333A"/>
+                  <a:srgbClr val="13223F"/>
                 </a:solidFill>
                 <a:latin typeface="Calibri" pitchFamily="34" charset="0"/>
                 <a:ea typeface="Calibri" pitchFamily="34" charset="-122"/>
@@ -5851,29 +5957,22 @@
             </a:avLst>
           </a:prstGeom>
           <a:solidFill>
-            <a:srgbClr val="EAF7FB"/>
+            <a:srgbClr val="EEF3FC"/>
           </a:solidFill>
           <a:ln w="12700">
             <a:solidFill>
-              <a:srgbClr val="D6E9EF"/>
+              <a:srgbClr val="DCE6F5"/>
             </a:solidFill>
             <a:prstDash val="solid"/>
           </a:ln>
           <a:effectLst>
-            <a:outerShdw blurRad="114300" dist="38100" dir="5400000" algn="bl" rotWithShape="0">
-              <a:srgbClr val="012932">
-                <a:alpha val="16000"/>
+            <a:outerShdw sx="100000" sy="100000" kx="0" ky="0" algn="bl" rotWithShape="0" blurRad="114300" dist="38100" dir="5400000">
+              <a:srgbClr val="0A1E42">
+                <a:alpha val="18000"/>
               </a:srgbClr>
             </a:outerShdw>
           </a:effectLst>
         </p:spPr>
-        <p:txBody>
-          <a:bodyPr/>
-          <a:lstStyle/>
-          <a:p>
-            <a:endParaRPr lang="en-US"/>
-          </a:p>
-        </p:txBody>
       </p:sp>
       <p:sp>
         <p:nvSpPr>
@@ -5896,13 +5995,13 @@
           <a:bodyPr wrap="square" lIns="0" tIns="0" rIns="0" bIns="0" rtlCol="0" anchor="ctr"/>
           <a:lstStyle/>
           <a:p>
-            <a:pPr marL="0" indent="0" algn="ctr">
+            <a:pPr algn="ctr" indent="0" marL="0">
               <a:buNone/>
             </a:pPr>
             <a:r>
               <a:rPr lang="en-US" sz="1150" b="1" i="1" dirty="0">
                 <a:solidFill>
-                  <a:srgbClr val="037B96"/>
+                  <a:srgbClr val="1D4ED8"/>
                 </a:solidFill>
                 <a:latin typeface="Calibri" pitchFamily="34" charset="0"/>
                 <a:ea typeface="Calibri" pitchFamily="34" charset="-122"/>
@@ -5929,22 +6028,15 @@
             <a:avLst/>
           </a:prstGeom>
           <a:solidFill>
-            <a:srgbClr val="012932"/>
+            <a:srgbClr val="0A1E42"/>
           </a:solidFill>
           <a:ln w="12700">
             <a:solidFill>
-              <a:srgbClr val="012932"/>
+              <a:srgbClr val="0A1E42"/>
             </a:solidFill>
             <a:prstDash val="solid"/>
           </a:ln>
         </p:spPr>
-        <p:txBody>
-          <a:bodyPr/>
-          <a:lstStyle/>
-          <a:p>
-            <a:endParaRPr lang="en-US"/>
-          </a:p>
-        </p:txBody>
       </p:sp>
       <p:sp>
         <p:nvSpPr>
@@ -5967,7 +6059,7 @@
           <a:bodyPr wrap="square" lIns="0" tIns="0" rIns="0" bIns="0" rtlCol="0" anchor="ctr"/>
           <a:lstStyle/>
           <a:p>
-            <a:pPr marL="0" indent="0" algn="ctr">
+            <a:pPr algn="ctr" indent="0" marL="0">
               <a:buNone/>
             </a:pPr>
             <a:r>
@@ -6006,13 +6098,13 @@
           <a:bodyPr wrap="square" lIns="0" tIns="0" rIns="0" bIns="0" rtlCol="0" anchor="ctr"/>
           <a:lstStyle/>
           <a:p>
-            <a:pPr marL="0" indent="0">
+            <a:pPr indent="0" marL="0">
               <a:buNone/>
             </a:pPr>
             <a:r>
               <a:rPr lang="en-US" sz="1800" b="1" dirty="0">
                 <a:solidFill>
-                  <a:srgbClr val="012932"/>
+                  <a:srgbClr val="0A1E42"/>
                 </a:solidFill>
                 <a:latin typeface="Cambria" pitchFamily="34" charset="0"/>
                 <a:ea typeface="Cambria" pitchFamily="34" charset="-122"/>
@@ -6045,7 +6137,7 @@
           <a:bodyPr wrap="square" lIns="0" tIns="0" rIns="0" bIns="0" rtlCol="0" anchor="ctr"/>
           <a:lstStyle/>
           <a:p>
-            <a:pPr marL="0" indent="0">
+            <a:pPr indent="0" marL="0">
               <a:lnSpc>
                 <a:spcPct val="102000"/>
               </a:lnSpc>
@@ -6054,7 +6146,7 @@
             <a:r>
               <a:rPr lang="en-US" sz="1350" dirty="0">
                 <a:solidFill>
-                  <a:srgbClr val="11333A"/>
+                  <a:srgbClr val="13223F"/>
                 </a:solidFill>
                 <a:latin typeface="Calibri" pitchFamily="34" charset="0"/>
                 <a:ea typeface="Calibri" pitchFamily="34" charset="-122"/>
@@ -6083,29 +6175,22 @@
             </a:avLst>
           </a:prstGeom>
           <a:solidFill>
-            <a:srgbClr val="EAF7FB"/>
+            <a:srgbClr val="EEF3FC"/>
           </a:solidFill>
           <a:ln w="12700">
             <a:solidFill>
-              <a:srgbClr val="D6E9EF"/>
+              <a:srgbClr val="DCE6F5"/>
             </a:solidFill>
             <a:prstDash val="solid"/>
           </a:ln>
           <a:effectLst>
-            <a:outerShdw blurRad="114300" dist="38100" dir="5400000" algn="bl" rotWithShape="0">
-              <a:srgbClr val="012932">
-                <a:alpha val="16000"/>
+            <a:outerShdw sx="100000" sy="100000" kx="0" ky="0" algn="bl" rotWithShape="0" blurRad="114300" dist="38100" dir="5400000">
+              <a:srgbClr val="0A1E42">
+                <a:alpha val="18000"/>
               </a:srgbClr>
             </a:outerShdw>
           </a:effectLst>
         </p:spPr>
-        <p:txBody>
-          <a:bodyPr/>
-          <a:lstStyle/>
-          <a:p>
-            <a:endParaRPr lang="en-US"/>
-          </a:p>
-        </p:txBody>
       </p:sp>
       <p:sp>
         <p:nvSpPr>
@@ -6128,13 +6213,13 @@
           <a:bodyPr wrap="square" lIns="0" tIns="0" rIns="0" bIns="0" rtlCol="0" anchor="ctr"/>
           <a:lstStyle/>
           <a:p>
-            <a:pPr marL="0" indent="0" algn="ctr">
+            <a:pPr algn="ctr" indent="0" marL="0">
               <a:buNone/>
             </a:pPr>
             <a:r>
               <a:rPr lang="en-US" sz="1150" b="1" i="1" dirty="0">
                 <a:solidFill>
-                  <a:srgbClr val="037B96"/>
+                  <a:srgbClr val="1D4ED8"/>
                 </a:solidFill>
                 <a:latin typeface="Calibri" pitchFamily="34" charset="0"/>
                 <a:ea typeface="Calibri" pitchFamily="34" charset="-122"/>
@@ -6160,9 +6245,8 @@
     <p:bg>
       <p:bgPr>
         <a:solidFill>
-          <a:srgbClr val="012932"/>
+          <a:srgbClr val="0A1E42"/>
         </a:solidFill>
-        <a:effectLst/>
       </p:bgPr>
     </p:bg>
     <p:spTree>
@@ -6200,7 +6284,7 @@
           <a:bodyPr wrap="square" lIns="0" tIns="0" rIns="0" bIns="0" rtlCol="0" anchor="ctr"/>
           <a:lstStyle/>
           <a:p>
-            <a:pPr marL="0" indent="0" algn="l">
+            <a:pPr algn="l" indent="0" marL="0">
               <a:buNone/>
             </a:pPr>
             <a:r>
@@ -6239,13 +6323,13 @@
           <a:bodyPr wrap="square" lIns="0" tIns="0" rIns="0" bIns="0" rtlCol="0" anchor="ctr"/>
           <a:lstStyle/>
           <a:p>
-            <a:pPr marL="0" indent="0">
+            <a:pPr indent="0" marL="0">
               <a:buNone/>
             </a:pPr>
             <a:r>
               <a:rPr lang="en-US" sz="1600" i="1" dirty="0">
                 <a:solidFill>
-                  <a:srgbClr val="82E6FD"/>
+                  <a:srgbClr val="8FB4FF"/>
                 </a:solidFill>
                 <a:latin typeface="Calibri" pitchFamily="34" charset="0"/>
                 <a:ea typeface="Calibri" pitchFamily="34" charset="-122"/>
@@ -6274,22 +6358,15 @@
             </a:avLst>
           </a:prstGeom>
           <a:solidFill>
-            <a:srgbClr val="0A3A45"/>
+            <a:srgbClr val="13306B"/>
           </a:solidFill>
           <a:ln w="12700">
             <a:solidFill>
-              <a:srgbClr val="037B96"/>
+              <a:srgbClr val="1D4ED8"/>
             </a:solidFill>
             <a:prstDash val="solid"/>
           </a:ln>
         </p:spPr>
-        <p:txBody>
-          <a:bodyPr/>
-          <a:lstStyle/>
-          <a:p>
-            <a:endParaRPr lang="en-US"/>
-          </a:p>
-        </p:txBody>
       </p:sp>
       <p:sp>
         <p:nvSpPr>
@@ -6312,13 +6389,13 @@
           <a:bodyPr wrap="square" lIns="0" tIns="0" rIns="0" bIns="0" rtlCol="0" anchor="ctr"/>
           <a:lstStyle/>
           <a:p>
-            <a:pPr marL="0" indent="0" algn="l">
+            <a:pPr algn="l" indent="0" marL="0">
               <a:buNone/>
             </a:pPr>
             <a:r>
               <a:rPr lang="en-US" sz="3400" b="1" dirty="0">
                 <a:solidFill>
-                  <a:srgbClr val="82E6FD"/>
+                  <a:srgbClr val="8FB4FF"/>
                 </a:solidFill>
                 <a:latin typeface="Cambria" pitchFamily="34" charset="0"/>
                 <a:ea typeface="Cambria" pitchFamily="34" charset="-122"/>
@@ -6351,13 +6428,13 @@
           <a:bodyPr wrap="square" lIns="0" tIns="0" rIns="0" bIns="0" rtlCol="0" anchor="t"/>
           <a:lstStyle/>
           <a:p>
-            <a:pPr marL="0" indent="0" algn="l">
+            <a:pPr algn="l" indent="0" marL="0">
               <a:buNone/>
             </a:pPr>
             <a:r>
               <a:rPr lang="en-US" sz="1250" dirty="0">
                 <a:solidFill>
-                  <a:srgbClr val="CFE8F0"/>
+                  <a:srgbClr val="C9D8F5"/>
                 </a:solidFill>
                 <a:latin typeface="Calibri" pitchFamily="34" charset="0"/>
                 <a:ea typeface="Calibri" pitchFamily="34" charset="-122"/>
@@ -6386,22 +6463,15 @@
             </a:avLst>
           </a:prstGeom>
           <a:solidFill>
-            <a:srgbClr val="0A3A45"/>
+            <a:srgbClr val="13306B"/>
           </a:solidFill>
           <a:ln w="12700">
             <a:solidFill>
-              <a:srgbClr val="037B96"/>
+              <a:srgbClr val="1D4ED8"/>
             </a:solidFill>
             <a:prstDash val="solid"/>
           </a:ln>
         </p:spPr>
-        <p:txBody>
-          <a:bodyPr/>
-          <a:lstStyle/>
-          <a:p>
-            <a:endParaRPr lang="en-US"/>
-          </a:p>
-        </p:txBody>
       </p:sp>
       <p:sp>
         <p:nvSpPr>
@@ -6424,13 +6494,13 @@
           <a:bodyPr wrap="square" lIns="0" tIns="0" rIns="0" bIns="0" rtlCol="0" anchor="ctr"/>
           <a:lstStyle/>
           <a:p>
-            <a:pPr marL="0" indent="0" algn="l">
+            <a:pPr algn="l" indent="0" marL="0">
               <a:buNone/>
             </a:pPr>
             <a:r>
               <a:rPr lang="en-US" sz="3400" b="1" dirty="0">
                 <a:solidFill>
-                  <a:srgbClr val="82E6FD"/>
+                  <a:srgbClr val="8FB4FF"/>
                 </a:solidFill>
                 <a:latin typeface="Cambria" pitchFamily="34" charset="0"/>
                 <a:ea typeface="Cambria" pitchFamily="34" charset="-122"/>
@@ -6463,13 +6533,13 @@
           <a:bodyPr wrap="square" lIns="0" tIns="0" rIns="0" bIns="0" rtlCol="0" anchor="t"/>
           <a:lstStyle/>
           <a:p>
-            <a:pPr marL="0" indent="0" algn="l">
+            <a:pPr algn="l" indent="0" marL="0">
               <a:buNone/>
             </a:pPr>
             <a:r>
               <a:rPr lang="en-US" sz="1250" dirty="0">
                 <a:solidFill>
-                  <a:srgbClr val="CFE8F0"/>
+                  <a:srgbClr val="C9D8F5"/>
                 </a:solidFill>
                 <a:latin typeface="Calibri" pitchFamily="34" charset="0"/>
                 <a:ea typeface="Calibri" pitchFamily="34" charset="-122"/>
@@ -6498,22 +6568,15 @@
             </a:avLst>
           </a:prstGeom>
           <a:solidFill>
-            <a:srgbClr val="0A3A45"/>
+            <a:srgbClr val="13306B"/>
           </a:solidFill>
           <a:ln w="12700">
             <a:solidFill>
-              <a:srgbClr val="037B96"/>
+              <a:srgbClr val="1D4ED8"/>
             </a:solidFill>
             <a:prstDash val="solid"/>
           </a:ln>
         </p:spPr>
-        <p:txBody>
-          <a:bodyPr/>
-          <a:lstStyle/>
-          <a:p>
-            <a:endParaRPr lang="en-US"/>
-          </a:p>
-        </p:txBody>
       </p:sp>
       <p:sp>
         <p:nvSpPr>
@@ -6536,13 +6599,13 @@
           <a:bodyPr wrap="square" lIns="0" tIns="0" rIns="0" bIns="0" rtlCol="0" anchor="ctr"/>
           <a:lstStyle/>
           <a:p>
-            <a:pPr marL="0" indent="0" algn="l">
+            <a:pPr algn="l" indent="0" marL="0">
               <a:buNone/>
             </a:pPr>
             <a:r>
               <a:rPr lang="en-US" sz="3400" b="1" dirty="0">
                 <a:solidFill>
-                  <a:srgbClr val="82E6FD"/>
+                  <a:srgbClr val="8FB4FF"/>
                 </a:solidFill>
                 <a:latin typeface="Cambria" pitchFamily="34" charset="0"/>
                 <a:ea typeface="Cambria" pitchFamily="34" charset="-122"/>
@@ -6575,13 +6638,13 @@
           <a:bodyPr wrap="square" lIns="0" tIns="0" rIns="0" bIns="0" rtlCol="0" anchor="t"/>
           <a:lstStyle/>
           <a:p>
-            <a:pPr marL="0" indent="0" algn="l">
+            <a:pPr algn="l" indent="0" marL="0">
               <a:buNone/>
             </a:pPr>
             <a:r>
               <a:rPr lang="en-US" sz="1250" dirty="0">
                 <a:solidFill>
-                  <a:srgbClr val="CFE8F0"/>
+                  <a:srgbClr val="C9D8F5"/>
                 </a:solidFill>
                 <a:latin typeface="Calibri" pitchFamily="34" charset="0"/>
                 <a:ea typeface="Calibri" pitchFamily="34" charset="-122"/>
@@ -6614,7 +6677,7 @@
           <a:bodyPr wrap="square" lIns="0" tIns="0" rIns="0" bIns="0" rtlCol="0" anchor="ctr"/>
           <a:lstStyle/>
           <a:p>
-            <a:pPr marL="0" indent="0">
+            <a:pPr indent="0" marL="0">
               <a:buNone/>
             </a:pPr>
             <a:r>
@@ -6649,22 +6712,15 @@
             </a:avLst>
           </a:prstGeom>
           <a:solidFill>
-            <a:srgbClr val="037B96"/>
+            <a:srgbClr val="1D4ED8"/>
           </a:solidFill>
           <a:ln w="12700">
             <a:solidFill>
-              <a:srgbClr val="037B96"/>
+              <a:srgbClr val="1D4ED8"/>
             </a:solidFill>
             <a:prstDash val="solid"/>
           </a:ln>
         </p:spPr>
-        <p:txBody>
-          <a:bodyPr/>
-          <a:lstStyle/>
-          <a:p>
-            <a:endParaRPr lang="en-US"/>
-          </a:p>
-        </p:txBody>
       </p:sp>
       <p:sp>
         <p:nvSpPr>
@@ -6687,7 +6743,7 @@
           <a:bodyPr wrap="square" lIns="0" tIns="0" rIns="0" bIns="0" rtlCol="0" anchor="ctr"/>
           <a:lstStyle/>
           <a:p>
-            <a:pPr marL="0" indent="0" algn="ctr">
+            <a:pPr algn="ctr" indent="0" marL="0">
               <a:buNone/>
             </a:pPr>
             <a:r>
@@ -6722,22 +6778,15 @@
             </a:avLst>
           </a:prstGeom>
           <a:solidFill>
-            <a:srgbClr val="0A3A45"/>
+            <a:srgbClr val="13306B"/>
           </a:solidFill>
           <a:ln w="12700">
             <a:solidFill>
-              <a:srgbClr val="037B96"/>
+              <a:srgbClr val="1D4ED8"/>
             </a:solidFill>
             <a:prstDash val="solid"/>
           </a:ln>
         </p:spPr>
-        <p:txBody>
-          <a:bodyPr/>
-          <a:lstStyle/>
-          <a:p>
-            <a:endParaRPr lang="en-US"/>
-          </a:p>
-        </p:txBody>
       </p:sp>
       <p:sp>
         <p:nvSpPr>
@@ -6760,7 +6809,7 @@
           <a:bodyPr wrap="square" lIns="0" tIns="0" rIns="0" bIns="0" rtlCol="0" anchor="ctr"/>
           <a:lstStyle/>
           <a:p>
-            <a:pPr marL="0" indent="0" algn="ctr">
+            <a:pPr algn="ctr" indent="0" marL="0">
               <a:buNone/>
             </a:pPr>
             <a:r>
@@ -6795,22 +6844,15 @@
             </a:avLst>
           </a:prstGeom>
           <a:solidFill>
-            <a:srgbClr val="0A3A45"/>
+            <a:srgbClr val="13306B"/>
           </a:solidFill>
           <a:ln w="12700">
             <a:solidFill>
-              <a:srgbClr val="037B96"/>
+              <a:srgbClr val="1D4ED8"/>
             </a:solidFill>
             <a:prstDash val="solid"/>
           </a:ln>
         </p:spPr>
-        <p:txBody>
-          <a:bodyPr/>
-          <a:lstStyle/>
-          <a:p>
-            <a:endParaRPr lang="en-US"/>
-          </a:p>
-        </p:txBody>
       </p:sp>
       <p:sp>
         <p:nvSpPr>
@@ -6833,7 +6875,7 @@
           <a:bodyPr wrap="square" lIns="0" tIns="0" rIns="0" bIns="0" rtlCol="0" anchor="ctr"/>
           <a:lstStyle/>
           <a:p>
-            <a:pPr marL="0" indent="0" algn="ctr">
+            <a:pPr algn="ctr" indent="0" marL="0">
               <a:buNone/>
             </a:pPr>
             <a:r>
@@ -6868,22 +6910,15 @@
             </a:avLst>
           </a:prstGeom>
           <a:solidFill>
-            <a:srgbClr val="0A3A45"/>
+            <a:srgbClr val="13306B"/>
           </a:solidFill>
           <a:ln w="12700">
             <a:solidFill>
-              <a:srgbClr val="037B96"/>
+              <a:srgbClr val="1D4ED8"/>
             </a:solidFill>
             <a:prstDash val="solid"/>
           </a:ln>
         </p:spPr>
-        <p:txBody>
-          <a:bodyPr/>
-          <a:lstStyle/>
-          <a:p>
-            <a:endParaRPr lang="en-US"/>
-          </a:p>
-        </p:txBody>
       </p:sp>
       <p:sp>
         <p:nvSpPr>
@@ -6906,7 +6941,7 @@
           <a:bodyPr wrap="square" lIns="0" tIns="0" rIns="0" bIns="0" rtlCol="0" anchor="ctr"/>
           <a:lstStyle/>
           <a:p>
-            <a:pPr marL="0" indent="0" algn="ctr">
+            <a:pPr algn="ctr" indent="0" marL="0">
               <a:buNone/>
             </a:pPr>
             <a:r>
@@ -6940,7 +6975,6 @@
         <a:solidFill>
           <a:srgbClr val="FFFFFF"/>
         </a:solidFill>
-        <a:effectLst/>
       </p:bgPr>
     </p:bg>
     <p:spTree>
@@ -6978,13 +7012,13 @@
           <a:bodyPr wrap="square" lIns="0" tIns="0" rIns="0" bIns="0" rtlCol="0" anchor="ctr"/>
           <a:lstStyle/>
           <a:p>
-            <a:pPr marL="0" indent="0" algn="l">
+            <a:pPr algn="l" indent="0" marL="0">
               <a:buNone/>
             </a:pPr>
             <a:r>
               <a:rPr lang="en-US" sz="3100" b="1" dirty="0">
                 <a:solidFill>
-                  <a:srgbClr val="012932"/>
+                  <a:srgbClr val="0A1E42"/>
                 </a:solidFill>
                 <a:latin typeface="Cambria" pitchFamily="34" charset="0"/>
                 <a:ea typeface="Cambria" pitchFamily="34" charset="-122"/>
@@ -7013,24 +7047,17 @@
             </a:avLst>
           </a:prstGeom>
           <a:solidFill>
-            <a:srgbClr val="012932"/>
+            <a:srgbClr val="0A1E42"/>
           </a:solidFill>
           <a:ln/>
           <a:effectLst>
-            <a:outerShdw blurRad="114300" dist="38100" dir="5400000" algn="bl" rotWithShape="0">
-              <a:srgbClr val="012932">
-                <a:alpha val="16000"/>
+            <a:outerShdw sx="100000" sy="100000" kx="0" ky="0" algn="bl" rotWithShape="0" blurRad="114300" dist="38100" dir="5400000">
+              <a:srgbClr val="0A1E42">
+                <a:alpha val="18000"/>
               </a:srgbClr>
             </a:outerShdw>
           </a:effectLst>
         </p:spPr>
-        <p:txBody>
-          <a:bodyPr/>
-          <a:lstStyle/>
-          <a:p>
-            <a:endParaRPr lang="en-US"/>
-          </a:p>
-        </p:txBody>
       </p:sp>
       <p:sp>
         <p:nvSpPr>
@@ -7053,13 +7080,13 @@
           <a:bodyPr wrap="square" lIns="0" tIns="0" rIns="0" bIns="0" rtlCol="0" anchor="ctr"/>
           <a:lstStyle/>
           <a:p>
-            <a:pPr marL="0" indent="0" algn="ctr">
+            <a:pPr algn="ctr" indent="0" marL="0">
               <a:buNone/>
             </a:pPr>
             <a:r>
               <a:rPr lang="en-US" sz="6000" b="1" dirty="0">
                 <a:solidFill>
-                  <a:srgbClr val="82E6FD"/>
+                  <a:srgbClr val="8FB4FF"/>
                 </a:solidFill>
                 <a:latin typeface="Cambria" pitchFamily="34" charset="0"/>
                 <a:ea typeface="Cambria" pitchFamily="34" charset="-122"/>
@@ -7092,7 +7119,7 @@
           <a:bodyPr wrap="square" lIns="0" tIns="0" rIns="0" bIns="0" rtlCol="0" anchor="t"/>
           <a:lstStyle/>
           <a:p>
-            <a:pPr marL="0" indent="0" algn="ctr">
+            <a:pPr algn="ctr" indent="0" marL="0">
               <a:lnSpc>
                 <a:spcPct val="110000"/>
               </a:lnSpc>
@@ -7134,13 +7161,13 @@
           <a:bodyPr wrap="square" lIns="0" tIns="0" rIns="0" bIns="0" rtlCol="0" anchor="ctr"/>
           <a:lstStyle/>
           <a:p>
-            <a:pPr marL="0" indent="0" algn="ctr">
+            <a:pPr algn="ctr" indent="0" marL="0">
               <a:buNone/>
             </a:pPr>
             <a:r>
               <a:rPr lang="en-US" sz="1200" i="1" dirty="0">
                 <a:solidFill>
-                  <a:srgbClr val="9FC7D3"/>
+                  <a:srgbClr val="A9BCE6"/>
                 </a:solidFill>
                 <a:latin typeface="Calibri" pitchFamily="34" charset="0"/>
                 <a:ea typeface="Calibri" pitchFamily="34" charset="-122"/>
@@ -7169,29 +7196,22 @@
             </a:avLst>
           </a:prstGeom>
           <a:solidFill>
-            <a:srgbClr val="EAF7FB"/>
+            <a:srgbClr val="EEF3FC"/>
           </a:solidFill>
           <a:ln w="12700">
             <a:solidFill>
-              <a:srgbClr val="D6E9EF"/>
+              <a:srgbClr val="DCE6F5"/>
             </a:solidFill>
             <a:prstDash val="solid"/>
           </a:ln>
           <a:effectLst>
-            <a:outerShdw blurRad="114300" dist="38100" dir="5400000" algn="bl" rotWithShape="0">
-              <a:srgbClr val="012932">
-                <a:alpha val="16000"/>
+            <a:outerShdw sx="100000" sy="100000" kx="0" ky="0" algn="bl" rotWithShape="0" blurRad="114300" dist="38100" dir="5400000">
+              <a:srgbClr val="0A1E42">
+                <a:alpha val="18000"/>
               </a:srgbClr>
             </a:outerShdw>
           </a:effectLst>
         </p:spPr>
-        <p:txBody>
-          <a:bodyPr/>
-          <a:lstStyle/>
-          <a:p>
-            <a:endParaRPr lang="en-US"/>
-          </a:p>
-        </p:txBody>
       </p:sp>
       <p:sp>
         <p:nvSpPr>
@@ -7208,22 +7228,15 @@
             <a:avLst/>
           </a:prstGeom>
           <a:solidFill>
-            <a:srgbClr val="012932"/>
+            <a:srgbClr val="0A1E42"/>
           </a:solidFill>
           <a:ln w="12700">
             <a:solidFill>
-              <a:srgbClr val="012932"/>
+              <a:srgbClr val="0A1E42"/>
             </a:solidFill>
             <a:prstDash val="solid"/>
           </a:ln>
         </p:spPr>
-        <p:txBody>
-          <a:bodyPr/>
-          <a:lstStyle/>
-          <a:p>
-            <a:endParaRPr lang="en-US"/>
-          </a:p>
-        </p:txBody>
       </p:sp>
       <p:sp>
         <p:nvSpPr>
@@ -7246,7 +7259,7 @@
           <a:bodyPr wrap="square" lIns="0" tIns="0" rIns="0" bIns="0" rtlCol="0" anchor="ctr"/>
           <a:lstStyle/>
           <a:p>
-            <a:pPr marL="0" indent="0" algn="ctr">
+            <a:pPr algn="ctr" indent="0" marL="0">
               <a:buNone/>
             </a:pPr>
             <a:r>
@@ -7285,13 +7298,13 @@
           <a:bodyPr wrap="square" lIns="0" tIns="0" rIns="0" bIns="0" rtlCol="0" anchor="ctr"/>
           <a:lstStyle/>
           <a:p>
-            <a:pPr marL="0" indent="0">
+            <a:pPr indent="0" marL="0">
               <a:buNone/>
             </a:pPr>
             <a:r>
               <a:rPr lang="en-US" sz="1700" b="1" dirty="0">
                 <a:solidFill>
-                  <a:srgbClr val="012932"/>
+                  <a:srgbClr val="0A1E42"/>
                 </a:solidFill>
                 <a:latin typeface="Cambria" pitchFamily="34" charset="0"/>
                 <a:ea typeface="Cambria" pitchFamily="34" charset="-122"/>
@@ -7324,13 +7337,13 @@
           <a:bodyPr wrap="square" lIns="0" tIns="0" rIns="0" bIns="0" rtlCol="0" anchor="t"/>
           <a:lstStyle/>
           <a:p>
-            <a:pPr marL="0" indent="0">
+            <a:pPr indent="0" marL="0">
               <a:buNone/>
             </a:pPr>
             <a:r>
               <a:rPr lang="en-US" sz="1300" dirty="0">
                 <a:solidFill>
-                  <a:srgbClr val="11333A"/>
+                  <a:srgbClr val="13223F"/>
                 </a:solidFill>
                 <a:latin typeface="Calibri" pitchFamily="34" charset="0"/>
                 <a:ea typeface="Calibri" pitchFamily="34" charset="-122"/>
@@ -7359,29 +7372,22 @@
             </a:avLst>
           </a:prstGeom>
           <a:solidFill>
-            <a:srgbClr val="EAF7FB"/>
+            <a:srgbClr val="EEF3FC"/>
           </a:solidFill>
           <a:ln w="12700">
             <a:solidFill>
-              <a:srgbClr val="D6E9EF"/>
+              <a:srgbClr val="DCE6F5"/>
             </a:solidFill>
             <a:prstDash val="solid"/>
           </a:ln>
           <a:effectLst>
-            <a:outerShdw blurRad="114300" dist="38100" dir="5400000" algn="bl" rotWithShape="0">
-              <a:srgbClr val="012932">
-                <a:alpha val="16000"/>
+            <a:outerShdw sx="100000" sy="100000" kx="0" ky="0" algn="bl" rotWithShape="0" blurRad="114300" dist="38100" dir="5400000">
+              <a:srgbClr val="0A1E42">
+                <a:alpha val="18000"/>
               </a:srgbClr>
             </a:outerShdw>
           </a:effectLst>
         </p:spPr>
-        <p:txBody>
-          <a:bodyPr/>
-          <a:lstStyle/>
-          <a:p>
-            <a:endParaRPr lang="en-US"/>
-          </a:p>
-        </p:txBody>
       </p:sp>
       <p:sp>
         <p:nvSpPr>
@@ -7398,22 +7404,15 @@
             <a:avLst/>
           </a:prstGeom>
           <a:solidFill>
-            <a:srgbClr val="037B96"/>
+            <a:srgbClr val="1D4ED8"/>
           </a:solidFill>
           <a:ln w="12700">
             <a:solidFill>
-              <a:srgbClr val="037B96"/>
+              <a:srgbClr val="1D4ED8"/>
             </a:solidFill>
             <a:prstDash val="solid"/>
           </a:ln>
         </p:spPr>
-        <p:txBody>
-          <a:bodyPr/>
-          <a:lstStyle/>
-          <a:p>
-            <a:endParaRPr lang="en-US"/>
-          </a:p>
-        </p:txBody>
       </p:sp>
       <p:sp>
         <p:nvSpPr>
@@ -7436,7 +7435,7 @@
           <a:bodyPr wrap="square" lIns="0" tIns="0" rIns="0" bIns="0" rtlCol="0" anchor="ctr"/>
           <a:lstStyle/>
           <a:p>
-            <a:pPr marL="0" indent="0" algn="ctr">
+            <a:pPr algn="ctr" indent="0" marL="0">
               <a:buNone/>
             </a:pPr>
             <a:r>
@@ -7475,13 +7474,13 @@
           <a:bodyPr wrap="square" lIns="0" tIns="0" rIns="0" bIns="0" rtlCol="0" anchor="ctr"/>
           <a:lstStyle/>
           <a:p>
-            <a:pPr marL="0" indent="0">
+            <a:pPr indent="0" marL="0">
               <a:buNone/>
             </a:pPr>
             <a:r>
               <a:rPr lang="en-US" sz="1700" b="1" dirty="0">
                 <a:solidFill>
-                  <a:srgbClr val="012932"/>
+                  <a:srgbClr val="0A1E42"/>
                 </a:solidFill>
                 <a:latin typeface="Cambria" pitchFamily="34" charset="0"/>
                 <a:ea typeface="Cambria" pitchFamily="34" charset="-122"/>
@@ -7514,13 +7513,13 @@
           <a:bodyPr wrap="square" lIns="0" tIns="0" rIns="0" bIns="0" rtlCol="0" anchor="t"/>
           <a:lstStyle/>
           <a:p>
-            <a:pPr marL="0" indent="0">
+            <a:pPr indent="0" marL="0">
               <a:buNone/>
             </a:pPr>
             <a:r>
               <a:rPr lang="en-US" sz="1300" dirty="0">
                 <a:solidFill>
-                  <a:srgbClr val="11333A"/>
+                  <a:srgbClr val="13223F"/>
                 </a:solidFill>
                 <a:latin typeface="Calibri" pitchFamily="34" charset="0"/>
                 <a:ea typeface="Calibri" pitchFamily="34" charset="-122"/>
@@ -7549,29 +7548,22 @@
             </a:avLst>
           </a:prstGeom>
           <a:solidFill>
-            <a:srgbClr val="EAF7FB"/>
+            <a:srgbClr val="EEF3FC"/>
           </a:solidFill>
           <a:ln w="12700">
             <a:solidFill>
-              <a:srgbClr val="D6E9EF"/>
+              <a:srgbClr val="DCE6F5"/>
             </a:solidFill>
             <a:prstDash val="solid"/>
           </a:ln>
           <a:effectLst>
-            <a:outerShdw blurRad="114300" dist="38100" dir="5400000" algn="bl" rotWithShape="0">
-              <a:srgbClr val="012932">
-                <a:alpha val="16000"/>
+            <a:outerShdw sx="100000" sy="100000" kx="0" ky="0" algn="bl" rotWithShape="0" blurRad="114300" dist="38100" dir="5400000">
+              <a:srgbClr val="0A1E42">
+                <a:alpha val="18000"/>
               </a:srgbClr>
             </a:outerShdw>
           </a:effectLst>
         </p:spPr>
-        <p:txBody>
-          <a:bodyPr/>
-          <a:lstStyle/>
-          <a:p>
-            <a:endParaRPr lang="en-US"/>
-          </a:p>
-        </p:txBody>
       </p:sp>
       <p:sp>
         <p:nvSpPr>
@@ -7588,22 +7580,15 @@
             <a:avLst/>
           </a:prstGeom>
           <a:solidFill>
-            <a:srgbClr val="012932"/>
+            <a:srgbClr val="0A1E42"/>
           </a:solidFill>
           <a:ln w="12700">
             <a:solidFill>
-              <a:srgbClr val="012932"/>
+              <a:srgbClr val="0A1E42"/>
             </a:solidFill>
             <a:prstDash val="solid"/>
           </a:ln>
         </p:spPr>
-        <p:txBody>
-          <a:bodyPr/>
-          <a:lstStyle/>
-          <a:p>
-            <a:endParaRPr lang="en-US"/>
-          </a:p>
-        </p:txBody>
       </p:sp>
       <p:sp>
         <p:nvSpPr>
@@ -7626,7 +7611,7 @@
           <a:bodyPr wrap="square" lIns="0" tIns="0" rIns="0" bIns="0" rtlCol="0" anchor="ctr"/>
           <a:lstStyle/>
           <a:p>
-            <a:pPr marL="0" indent="0" algn="ctr">
+            <a:pPr algn="ctr" indent="0" marL="0">
               <a:buNone/>
             </a:pPr>
             <a:r>
@@ -7665,13 +7650,13 @@
           <a:bodyPr wrap="square" lIns="0" tIns="0" rIns="0" bIns="0" rtlCol="0" anchor="ctr"/>
           <a:lstStyle/>
           <a:p>
-            <a:pPr marL="0" indent="0">
+            <a:pPr indent="0" marL="0">
               <a:buNone/>
             </a:pPr>
             <a:r>
               <a:rPr lang="en-US" sz="1700" b="1" dirty="0">
                 <a:solidFill>
-                  <a:srgbClr val="012932"/>
+                  <a:srgbClr val="0A1E42"/>
                 </a:solidFill>
                 <a:latin typeface="Cambria" pitchFamily="34" charset="0"/>
                 <a:ea typeface="Cambria" pitchFamily="34" charset="-122"/>
@@ -7704,13 +7689,13 @@
           <a:bodyPr wrap="square" lIns="0" tIns="0" rIns="0" bIns="0" rtlCol="0" anchor="t"/>
           <a:lstStyle/>
           <a:p>
-            <a:pPr marL="0" indent="0">
+            <a:pPr indent="0" marL="0">
               <a:buNone/>
             </a:pPr>
             <a:r>
               <a:rPr lang="en-US" sz="1300" dirty="0">
                 <a:solidFill>
-                  <a:srgbClr val="11333A"/>
+                  <a:srgbClr val="13223F"/>
                 </a:solidFill>
                 <a:latin typeface="Calibri" pitchFamily="34" charset="0"/>
                 <a:ea typeface="Calibri" pitchFamily="34" charset="-122"/>
@@ -7738,7 +7723,6 @@
         <a:solidFill>
           <a:srgbClr val="FFFFFF"/>
         </a:solidFill>
-        <a:effectLst/>
       </p:bgPr>
     </p:bg>
     <p:spTree>
@@ -7776,13 +7760,13 @@
           <a:bodyPr wrap="square" lIns="0" tIns="0" rIns="0" bIns="0" rtlCol="0" anchor="ctr"/>
           <a:lstStyle/>
           <a:p>
-            <a:pPr marL="0" indent="0" algn="l">
+            <a:pPr algn="l" indent="0" marL="0">
               <a:buNone/>
             </a:pPr>
             <a:r>
               <a:rPr lang="en-US" sz="3100" b="1" dirty="0">
                 <a:solidFill>
-                  <a:srgbClr val="012932"/>
+                  <a:srgbClr val="0A1E42"/>
                 </a:solidFill>
                 <a:latin typeface="Cambria" pitchFamily="34" charset="0"/>
                 <a:ea typeface="Cambria" pitchFamily="34" charset="-122"/>
@@ -7815,13 +7799,13 @@
           <a:bodyPr wrap="square" lIns="0" tIns="0" rIns="0" bIns="0" rtlCol="0" anchor="ctr"/>
           <a:lstStyle/>
           <a:p>
-            <a:pPr marL="0" indent="0">
+            <a:pPr indent="0" marL="0">
               <a:buNone/>
             </a:pPr>
             <a:r>
               <a:rPr lang="en-US" sz="1500" i="1" dirty="0">
                 <a:solidFill>
-                  <a:srgbClr val="5A6B70"/>
+                  <a:srgbClr val="5A6478"/>
                 </a:solidFill>
                 <a:latin typeface="Calibri" pitchFamily="34" charset="0"/>
                 <a:ea typeface="Calibri" pitchFamily="34" charset="-122"/>
@@ -7850,17 +7834,10 @@
             </a:avLst>
           </a:prstGeom>
           <a:solidFill>
-            <a:srgbClr val="037B96"/>
+            <a:srgbClr val="1D4ED8"/>
           </a:solidFill>
           <a:ln/>
         </p:spPr>
-        <p:txBody>
-          <a:bodyPr/>
-          <a:lstStyle/>
-          <a:p>
-            <a:endParaRPr lang="en-US"/>
-          </a:p>
-        </p:txBody>
       </p:sp>
       <p:sp>
         <p:nvSpPr>
@@ -7883,7 +7860,7 @@
           <a:bodyPr wrap="square" lIns="0" tIns="0" rIns="0" bIns="0" rtlCol="0" anchor="ctr"/>
           <a:lstStyle/>
           <a:p>
-            <a:pPr marL="0" indent="0" algn="ctr">
+            <a:pPr algn="ctr" indent="0" marL="0">
               <a:buNone/>
             </a:pPr>
             <a:r>
@@ -7918,29 +7895,22 @@
             </a:avLst>
           </a:prstGeom>
           <a:solidFill>
-            <a:srgbClr val="EAF7FB"/>
+            <a:srgbClr val="EEF3FC"/>
           </a:solidFill>
           <a:ln w="12700">
             <a:solidFill>
-              <a:srgbClr val="D6E9EF"/>
+              <a:srgbClr val="DCE6F5"/>
             </a:solidFill>
             <a:prstDash val="solid"/>
           </a:ln>
           <a:effectLst>
-            <a:outerShdw blurRad="114300" dist="38100" dir="5400000" algn="bl" rotWithShape="0">
-              <a:srgbClr val="012932">
-                <a:alpha val="16000"/>
+            <a:outerShdw sx="100000" sy="100000" kx="0" ky="0" algn="bl" rotWithShape="0" blurRad="114300" dist="38100" dir="5400000">
+              <a:srgbClr val="0A1E42">
+                <a:alpha val="18000"/>
               </a:srgbClr>
             </a:outerShdw>
           </a:effectLst>
         </p:spPr>
-        <p:txBody>
-          <a:bodyPr/>
-          <a:lstStyle/>
-          <a:p>
-            <a:endParaRPr lang="en-US"/>
-          </a:p>
-        </p:txBody>
       </p:sp>
       <p:sp>
         <p:nvSpPr>
@@ -7963,13 +7933,13 @@
           <a:bodyPr wrap="square" lIns="0" tIns="0" rIns="0" bIns="0" rtlCol="0" anchor="ctr"/>
           <a:lstStyle/>
           <a:p>
-            <a:pPr marL="0" indent="0">
+            <a:pPr indent="0" marL="0">
               <a:buNone/>
             </a:pPr>
             <a:r>
               <a:rPr lang="en-US" sz="1450" b="1" dirty="0">
                 <a:solidFill>
-                  <a:srgbClr val="012932"/>
+                  <a:srgbClr val="0A1E42"/>
                 </a:solidFill>
                 <a:latin typeface="Calibri" pitchFamily="34" charset="0"/>
                 <a:ea typeface="Calibri" pitchFamily="34" charset="-122"/>
@@ -8002,7 +7972,7 @@
           <a:bodyPr wrap="square" lIns="0" tIns="0" rIns="0" bIns="0" rtlCol="0" anchor="t"/>
           <a:lstStyle/>
           <a:p>
-            <a:pPr marL="0" indent="0">
+            <a:pPr indent="0" marL="0">
               <a:lnSpc>
                 <a:spcPct val="105000"/>
               </a:lnSpc>
@@ -8011,7 +7981,7 @@
             <a:r>
               <a:rPr lang="en-US" sz="1300" dirty="0">
                 <a:solidFill>
-                  <a:srgbClr val="11333A"/>
+                  <a:srgbClr val="13223F"/>
                 </a:solidFill>
                 <a:latin typeface="Calibri" pitchFamily="34" charset="0"/>
                 <a:ea typeface="Calibri" pitchFamily="34" charset="-122"/>
@@ -8040,17 +8010,10 @@
             </a:avLst>
           </a:prstGeom>
           <a:solidFill>
-            <a:srgbClr val="012932"/>
+            <a:srgbClr val="0A1E42"/>
           </a:solidFill>
           <a:ln/>
         </p:spPr>
-        <p:txBody>
-          <a:bodyPr/>
-          <a:lstStyle/>
-          <a:p>
-            <a:endParaRPr lang="en-US"/>
-          </a:p>
-        </p:txBody>
       </p:sp>
       <p:sp>
         <p:nvSpPr>
@@ -8073,7 +8036,7 @@
           <a:bodyPr wrap="square" lIns="0" tIns="0" rIns="0" bIns="0" rtlCol="0" anchor="ctr"/>
           <a:lstStyle/>
           <a:p>
-            <a:pPr marL="0" indent="0" algn="ctr">
+            <a:pPr algn="ctr" indent="0" marL="0">
               <a:buNone/>
             </a:pPr>
             <a:r>
@@ -8108,29 +8071,22 @@
             </a:avLst>
           </a:prstGeom>
           <a:solidFill>
-            <a:srgbClr val="EAF7FB"/>
+            <a:srgbClr val="EEF3FC"/>
           </a:solidFill>
           <a:ln w="12700">
             <a:solidFill>
-              <a:srgbClr val="D6E9EF"/>
+              <a:srgbClr val="DCE6F5"/>
             </a:solidFill>
             <a:prstDash val="solid"/>
           </a:ln>
           <a:effectLst>
-            <a:outerShdw blurRad="114300" dist="38100" dir="5400000" algn="bl" rotWithShape="0">
-              <a:srgbClr val="012932">
-                <a:alpha val="16000"/>
+            <a:outerShdw sx="100000" sy="100000" kx="0" ky="0" algn="bl" rotWithShape="0" blurRad="114300" dist="38100" dir="5400000">
+              <a:srgbClr val="0A1E42">
+                <a:alpha val="18000"/>
               </a:srgbClr>
             </a:outerShdw>
           </a:effectLst>
         </p:spPr>
-        <p:txBody>
-          <a:bodyPr/>
-          <a:lstStyle/>
-          <a:p>
-            <a:endParaRPr lang="en-US"/>
-          </a:p>
-        </p:txBody>
       </p:sp>
       <p:sp>
         <p:nvSpPr>
@@ -8153,13 +8109,13 @@
           <a:bodyPr wrap="square" lIns="0" tIns="0" rIns="0" bIns="0" rtlCol="0" anchor="ctr"/>
           <a:lstStyle/>
           <a:p>
-            <a:pPr marL="0" indent="0">
+            <a:pPr indent="0" marL="0">
               <a:buNone/>
             </a:pPr>
             <a:r>
               <a:rPr lang="en-US" sz="1450" b="1" dirty="0">
                 <a:solidFill>
-                  <a:srgbClr val="012932"/>
+                  <a:srgbClr val="0A1E42"/>
                 </a:solidFill>
                 <a:latin typeface="Calibri" pitchFamily="34" charset="0"/>
                 <a:ea typeface="Calibri" pitchFamily="34" charset="-122"/>
@@ -8192,7 +8148,7 @@
           <a:bodyPr wrap="square" lIns="0" tIns="0" rIns="0" bIns="0" rtlCol="0" anchor="t"/>
           <a:lstStyle/>
           <a:p>
-            <a:pPr marL="0" indent="0">
+            <a:pPr indent="0" marL="0">
               <a:lnSpc>
                 <a:spcPct val="105000"/>
               </a:lnSpc>
@@ -8201,7 +8157,7 @@
             <a:r>
               <a:rPr lang="en-US" sz="1300" dirty="0">
                 <a:solidFill>
-                  <a:srgbClr val="11333A"/>
+                  <a:srgbClr val="13223F"/>
                 </a:solidFill>
                 <a:latin typeface="Calibri" pitchFamily="34" charset="0"/>
                 <a:ea typeface="Calibri" pitchFamily="34" charset="-122"/>
@@ -8230,17 +8186,10 @@
             </a:avLst>
           </a:prstGeom>
           <a:solidFill>
-            <a:srgbClr val="037B96"/>
+            <a:srgbClr val="1D4ED8"/>
           </a:solidFill>
           <a:ln/>
         </p:spPr>
-        <p:txBody>
-          <a:bodyPr/>
-          <a:lstStyle/>
-          <a:p>
-            <a:endParaRPr lang="en-US"/>
-          </a:p>
-        </p:txBody>
       </p:sp>
       <p:sp>
         <p:nvSpPr>
@@ -8263,7 +8212,7 @@
           <a:bodyPr wrap="square" lIns="0" tIns="0" rIns="0" bIns="0" rtlCol="0" anchor="ctr"/>
           <a:lstStyle/>
           <a:p>
-            <a:pPr marL="0" indent="0" algn="ctr">
+            <a:pPr algn="ctr" indent="0" marL="0">
               <a:buNone/>
             </a:pPr>
             <a:r>
@@ -8298,29 +8247,22 @@
             </a:avLst>
           </a:prstGeom>
           <a:solidFill>
-            <a:srgbClr val="EAF7FB"/>
+            <a:srgbClr val="EEF3FC"/>
           </a:solidFill>
           <a:ln w="12700">
             <a:solidFill>
-              <a:srgbClr val="D6E9EF"/>
+              <a:srgbClr val="DCE6F5"/>
             </a:solidFill>
             <a:prstDash val="solid"/>
           </a:ln>
           <a:effectLst>
-            <a:outerShdw blurRad="114300" dist="38100" dir="5400000" algn="bl" rotWithShape="0">
-              <a:srgbClr val="012932">
-                <a:alpha val="16000"/>
+            <a:outerShdw sx="100000" sy="100000" kx="0" ky="0" algn="bl" rotWithShape="0" blurRad="114300" dist="38100" dir="5400000">
+              <a:srgbClr val="0A1E42">
+                <a:alpha val="18000"/>
               </a:srgbClr>
             </a:outerShdw>
           </a:effectLst>
         </p:spPr>
-        <p:txBody>
-          <a:bodyPr/>
-          <a:lstStyle/>
-          <a:p>
-            <a:endParaRPr lang="en-US"/>
-          </a:p>
-        </p:txBody>
       </p:sp>
       <p:sp>
         <p:nvSpPr>
@@ -8343,13 +8285,13 @@
           <a:bodyPr wrap="square" lIns="0" tIns="0" rIns="0" bIns="0" rtlCol="0" anchor="ctr"/>
           <a:lstStyle/>
           <a:p>
-            <a:pPr marL="0" indent="0">
+            <a:pPr indent="0" marL="0">
               <a:buNone/>
             </a:pPr>
             <a:r>
               <a:rPr lang="en-US" sz="1450" b="1" dirty="0">
                 <a:solidFill>
-                  <a:srgbClr val="012932"/>
+                  <a:srgbClr val="0A1E42"/>
                 </a:solidFill>
                 <a:latin typeface="Calibri" pitchFamily="34" charset="0"/>
                 <a:ea typeface="Calibri" pitchFamily="34" charset="-122"/>
@@ -8382,7 +8324,7 @@
           <a:bodyPr wrap="square" lIns="0" tIns="0" rIns="0" bIns="0" rtlCol="0" anchor="t"/>
           <a:lstStyle/>
           <a:p>
-            <a:pPr marL="0" indent="0">
+            <a:pPr indent="0" marL="0">
               <a:lnSpc>
                 <a:spcPct val="105000"/>
               </a:lnSpc>
@@ -8391,7 +8333,7 @@
             <a:r>
               <a:rPr lang="en-US" sz="1300" dirty="0">
                 <a:solidFill>
-                  <a:srgbClr val="11333A"/>
+                  <a:srgbClr val="13223F"/>
                 </a:solidFill>
                 <a:latin typeface="Calibri" pitchFamily="34" charset="0"/>
                 <a:ea typeface="Calibri" pitchFamily="34" charset="-122"/>
@@ -8419,7 +8361,6 @@
         <a:solidFill>
           <a:srgbClr val="FFFFFF"/>
         </a:solidFill>
-        <a:effectLst/>
       </p:bgPr>
     </p:bg>
     <p:spTree>
@@ -8457,13 +8398,13 @@
           <a:bodyPr wrap="square" lIns="0" tIns="0" rIns="0" bIns="0" rtlCol="0" anchor="ctr"/>
           <a:lstStyle/>
           <a:p>
-            <a:pPr marL="0" indent="0" algn="l">
+            <a:pPr algn="l" indent="0" marL="0">
               <a:buNone/>
             </a:pPr>
             <a:r>
               <a:rPr lang="en-US" sz="3100" b="1" dirty="0">
                 <a:solidFill>
-                  <a:srgbClr val="012932"/>
+                  <a:srgbClr val="0A1E42"/>
                 </a:solidFill>
                 <a:latin typeface="Cambria" pitchFamily="34" charset="0"/>
                 <a:ea typeface="Cambria" pitchFamily="34" charset="-122"/>
@@ -8496,13 +8437,13 @@
           <a:bodyPr wrap="square" lIns="0" tIns="0" rIns="0" bIns="0" rtlCol="0" anchor="ctr"/>
           <a:lstStyle/>
           <a:p>
-            <a:pPr marL="0" indent="0">
+            <a:pPr indent="0" marL="0">
               <a:buNone/>
             </a:pPr>
             <a:r>
               <a:rPr lang="en-US" sz="1500" i="1" dirty="0">
                 <a:solidFill>
-                  <a:srgbClr val="5A6B70"/>
+                  <a:srgbClr val="5A6478"/>
                 </a:solidFill>
                 <a:latin typeface="Calibri" pitchFamily="34" charset="0"/>
                 <a:ea typeface="Calibri" pitchFamily="34" charset="-122"/>
@@ -8531,29 +8472,22 @@
             </a:avLst>
           </a:prstGeom>
           <a:solidFill>
-            <a:srgbClr val="EAF7FB"/>
+            <a:srgbClr val="EEF3FC"/>
           </a:solidFill>
           <a:ln w="12700">
             <a:solidFill>
-              <a:srgbClr val="D6E9EF"/>
+              <a:srgbClr val="DCE6F5"/>
             </a:solidFill>
             <a:prstDash val="solid"/>
           </a:ln>
           <a:effectLst>
-            <a:outerShdw blurRad="114300" dist="38100" dir="5400000" algn="bl" rotWithShape="0">
-              <a:srgbClr val="012932">
-                <a:alpha val="16000"/>
+            <a:outerShdw sx="100000" sy="100000" kx="0" ky="0" algn="bl" rotWithShape="0" blurRad="114300" dist="38100" dir="5400000">
+              <a:srgbClr val="0A1E42">
+                <a:alpha val="18000"/>
               </a:srgbClr>
             </a:outerShdw>
           </a:effectLst>
         </p:spPr>
-        <p:txBody>
-          <a:bodyPr/>
-          <a:lstStyle/>
-          <a:p>
-            <a:endParaRPr lang="en-US"/>
-          </a:p>
-        </p:txBody>
       </p:sp>
       <p:sp>
         <p:nvSpPr>
@@ -8576,13 +8510,13 @@
           <a:bodyPr wrap="square" lIns="0" tIns="0" rIns="0" bIns="0" rtlCol="0" anchor="t"/>
           <a:lstStyle/>
           <a:p>
-            <a:pPr marL="0" indent="0">
+            <a:pPr indent="0" marL="0">
               <a:buNone/>
             </a:pPr>
             <a:r>
               <a:rPr lang="en-US" sz="1800" b="1" dirty="0">
                 <a:solidFill>
-                  <a:srgbClr val="012932"/>
+                  <a:srgbClr val="0A1E42"/>
                 </a:solidFill>
                 <a:latin typeface="Cambria" pitchFamily="34" charset="0"/>
                 <a:ea typeface="Cambria" pitchFamily="34" charset="-122"/>
@@ -8615,13 +8549,13 @@
           <a:bodyPr wrap="square" lIns="0" tIns="0" rIns="0" bIns="0" rtlCol="0" anchor="t"/>
           <a:lstStyle/>
           <a:p>
-            <a:pPr marL="0" indent="0">
+            <a:pPr indent="0" marL="0">
               <a:buNone/>
             </a:pPr>
             <a:r>
               <a:rPr lang="en-US" sz="1350" dirty="0">
                 <a:solidFill>
-                  <a:srgbClr val="11333A"/>
+                  <a:srgbClr val="13223F"/>
                 </a:solidFill>
                 <a:latin typeface="Calibri" pitchFamily="34" charset="0"/>
                 <a:ea typeface="Calibri" pitchFamily="34" charset="-122"/>
@@ -8650,22 +8584,15 @@
             </a:avLst>
           </a:prstGeom>
           <a:solidFill>
-            <a:srgbClr val="EAF7FB"/>
+            <a:srgbClr val="EEF3FC"/>
           </a:solidFill>
           <a:ln w="12700">
             <a:solidFill>
-              <a:srgbClr val="037B96"/>
+              <a:srgbClr val="1D4ED8"/>
             </a:solidFill>
             <a:prstDash val="solid"/>
           </a:ln>
         </p:spPr>
-        <p:txBody>
-          <a:bodyPr/>
-          <a:lstStyle/>
-          <a:p>
-            <a:endParaRPr lang="en-US"/>
-          </a:p>
-        </p:txBody>
       </p:sp>
       <p:sp>
         <p:nvSpPr>
@@ -8688,13 +8615,13 @@
           <a:bodyPr wrap="square" lIns="0" tIns="0" rIns="0" bIns="0" rtlCol="0" anchor="ctr"/>
           <a:lstStyle/>
           <a:p>
-            <a:pPr marL="0" indent="0" algn="ctr">
+            <a:pPr algn="ctr" indent="0" marL="0">
               <a:buNone/>
             </a:pPr>
             <a:r>
               <a:rPr lang="en-US" sz="1200" b="1" dirty="0">
                 <a:solidFill>
-                  <a:srgbClr val="037B96"/>
+                  <a:srgbClr val="1D4ED8"/>
                 </a:solidFill>
                 <a:latin typeface="Calibri" pitchFamily="34" charset="0"/>
                 <a:ea typeface="Calibri" pitchFamily="34" charset="-122"/>
@@ -8723,29 +8650,22 @@
             </a:avLst>
           </a:prstGeom>
           <a:solidFill>
-            <a:srgbClr val="EAF7FB"/>
+            <a:srgbClr val="EEF3FC"/>
           </a:solidFill>
           <a:ln w="12700">
             <a:solidFill>
-              <a:srgbClr val="D6E9EF"/>
+              <a:srgbClr val="DCE6F5"/>
             </a:solidFill>
             <a:prstDash val="solid"/>
           </a:ln>
           <a:effectLst>
-            <a:outerShdw blurRad="114300" dist="38100" dir="5400000" algn="bl" rotWithShape="0">
-              <a:srgbClr val="012932">
-                <a:alpha val="16000"/>
+            <a:outerShdw sx="100000" sy="100000" kx="0" ky="0" algn="bl" rotWithShape="0" blurRad="114300" dist="38100" dir="5400000">
+              <a:srgbClr val="0A1E42">
+                <a:alpha val="18000"/>
               </a:srgbClr>
             </a:outerShdw>
           </a:effectLst>
         </p:spPr>
-        <p:txBody>
-          <a:bodyPr/>
-          <a:lstStyle/>
-          <a:p>
-            <a:endParaRPr lang="en-US"/>
-          </a:p>
-        </p:txBody>
       </p:sp>
       <p:sp>
         <p:nvSpPr>
@@ -8768,13 +8688,13 @@
           <a:bodyPr wrap="square" lIns="0" tIns="0" rIns="0" bIns="0" rtlCol="0" anchor="t"/>
           <a:lstStyle/>
           <a:p>
-            <a:pPr marL="0" indent="0">
+            <a:pPr indent="0" marL="0">
               <a:buNone/>
             </a:pPr>
             <a:r>
               <a:rPr lang="en-US" sz="1800" b="1" dirty="0">
                 <a:solidFill>
-                  <a:srgbClr val="012932"/>
+                  <a:srgbClr val="0A1E42"/>
                 </a:solidFill>
                 <a:latin typeface="Cambria" pitchFamily="34" charset="0"/>
                 <a:ea typeface="Cambria" pitchFamily="34" charset="-122"/>
@@ -8807,13 +8727,13 @@
           <a:bodyPr wrap="square" lIns="0" tIns="0" rIns="0" bIns="0" rtlCol="0" anchor="t"/>
           <a:lstStyle/>
           <a:p>
-            <a:pPr marL="0" indent="0">
+            <a:pPr indent="0" marL="0">
               <a:buNone/>
             </a:pPr>
             <a:r>
               <a:rPr lang="en-US" sz="1350" dirty="0">
                 <a:solidFill>
-                  <a:srgbClr val="11333A"/>
+                  <a:srgbClr val="13223F"/>
                 </a:solidFill>
                 <a:latin typeface="Calibri" pitchFamily="34" charset="0"/>
                 <a:ea typeface="Calibri" pitchFamily="34" charset="-122"/>
@@ -8842,22 +8762,15 @@
             </a:avLst>
           </a:prstGeom>
           <a:solidFill>
-            <a:srgbClr val="EAF7FB"/>
+            <a:srgbClr val="EEF3FC"/>
           </a:solidFill>
           <a:ln w="12700">
             <a:solidFill>
-              <a:srgbClr val="037B96"/>
+              <a:srgbClr val="1D4ED8"/>
             </a:solidFill>
             <a:prstDash val="solid"/>
           </a:ln>
         </p:spPr>
-        <p:txBody>
-          <a:bodyPr/>
-          <a:lstStyle/>
-          <a:p>
-            <a:endParaRPr lang="en-US"/>
-          </a:p>
-        </p:txBody>
       </p:sp>
       <p:sp>
         <p:nvSpPr>
@@ -8880,13 +8793,13 @@
           <a:bodyPr wrap="square" lIns="0" tIns="0" rIns="0" bIns="0" rtlCol="0" anchor="ctr"/>
           <a:lstStyle/>
           <a:p>
-            <a:pPr marL="0" indent="0" algn="ctr">
+            <a:pPr algn="ctr" indent="0" marL="0">
               <a:buNone/>
             </a:pPr>
             <a:r>
               <a:rPr lang="en-US" sz="1200" b="1" dirty="0">
                 <a:solidFill>
-                  <a:srgbClr val="037B96"/>
+                  <a:srgbClr val="1D4ED8"/>
                 </a:solidFill>
                 <a:latin typeface="Calibri" pitchFamily="34" charset="0"/>
                 <a:ea typeface="Calibri" pitchFamily="34" charset="-122"/>
@@ -8915,29 +8828,22 @@
             </a:avLst>
           </a:prstGeom>
           <a:solidFill>
-            <a:srgbClr val="EAF7FB"/>
+            <a:srgbClr val="EEF3FC"/>
           </a:solidFill>
           <a:ln w="12700">
             <a:solidFill>
-              <a:srgbClr val="D6E9EF"/>
+              <a:srgbClr val="DCE6F5"/>
             </a:solidFill>
             <a:prstDash val="solid"/>
           </a:ln>
           <a:effectLst>
-            <a:outerShdw blurRad="114300" dist="38100" dir="5400000" algn="bl" rotWithShape="0">
-              <a:srgbClr val="012932">
-                <a:alpha val="16000"/>
+            <a:outerShdw sx="100000" sy="100000" kx="0" ky="0" algn="bl" rotWithShape="0" blurRad="114300" dist="38100" dir="5400000">
+              <a:srgbClr val="0A1E42">
+                <a:alpha val="18000"/>
               </a:srgbClr>
             </a:outerShdw>
           </a:effectLst>
         </p:spPr>
-        <p:txBody>
-          <a:bodyPr/>
-          <a:lstStyle/>
-          <a:p>
-            <a:endParaRPr lang="en-US"/>
-          </a:p>
-        </p:txBody>
       </p:sp>
       <p:sp>
         <p:nvSpPr>
@@ -8960,13 +8866,13 @@
           <a:bodyPr wrap="square" lIns="0" tIns="0" rIns="0" bIns="0" rtlCol="0" anchor="t"/>
           <a:lstStyle/>
           <a:p>
-            <a:pPr marL="0" indent="0">
+            <a:pPr indent="0" marL="0">
               <a:buNone/>
             </a:pPr>
             <a:r>
               <a:rPr lang="en-US" sz="1800" b="1" dirty="0">
                 <a:solidFill>
-                  <a:srgbClr val="012932"/>
+                  <a:srgbClr val="0A1E42"/>
                 </a:solidFill>
                 <a:latin typeface="Cambria" pitchFamily="34" charset="0"/>
                 <a:ea typeface="Cambria" pitchFamily="34" charset="-122"/>
@@ -8999,13 +8905,13 @@
           <a:bodyPr wrap="square" lIns="0" tIns="0" rIns="0" bIns="0" rtlCol="0" anchor="t"/>
           <a:lstStyle/>
           <a:p>
-            <a:pPr marL="0" indent="0">
+            <a:pPr indent="0" marL="0">
               <a:buNone/>
             </a:pPr>
             <a:r>
               <a:rPr lang="en-US" sz="1350" dirty="0">
                 <a:solidFill>
-                  <a:srgbClr val="11333A"/>
+                  <a:srgbClr val="13223F"/>
                 </a:solidFill>
                 <a:latin typeface="Calibri" pitchFamily="34" charset="0"/>
                 <a:ea typeface="Calibri" pitchFamily="34" charset="-122"/>
@@ -9034,22 +8940,15 @@
             </a:avLst>
           </a:prstGeom>
           <a:solidFill>
-            <a:srgbClr val="EAF7FB"/>
+            <a:srgbClr val="EEF3FC"/>
           </a:solidFill>
           <a:ln w="12700">
             <a:solidFill>
-              <a:srgbClr val="037B96"/>
+              <a:srgbClr val="1D4ED8"/>
             </a:solidFill>
             <a:prstDash val="solid"/>
           </a:ln>
         </p:spPr>
-        <p:txBody>
-          <a:bodyPr/>
-          <a:lstStyle/>
-          <a:p>
-            <a:endParaRPr lang="en-US"/>
-          </a:p>
-        </p:txBody>
       </p:sp>
       <p:sp>
         <p:nvSpPr>
@@ -9072,13 +8971,13 @@
           <a:bodyPr wrap="square" lIns="0" tIns="0" rIns="0" bIns="0" rtlCol="0" anchor="ctr"/>
           <a:lstStyle/>
           <a:p>
-            <a:pPr marL="0" indent="0" algn="ctr">
+            <a:pPr algn="ctr" indent="0" marL="0">
               <a:buNone/>
             </a:pPr>
             <a:r>
               <a:rPr lang="en-US" sz="1200" b="1" dirty="0">
                 <a:solidFill>
-                  <a:srgbClr val="037B96"/>
+                  <a:srgbClr val="1D4ED8"/>
                 </a:solidFill>
                 <a:latin typeface="Calibri" pitchFamily="34" charset="0"/>
                 <a:ea typeface="Calibri" pitchFamily="34" charset="-122"/>
@@ -9107,29 +9006,22 @@
             </a:avLst>
           </a:prstGeom>
           <a:solidFill>
-            <a:srgbClr val="EAF7FB"/>
+            <a:srgbClr val="EEF3FC"/>
           </a:solidFill>
           <a:ln w="12700">
             <a:solidFill>
-              <a:srgbClr val="D6E9EF"/>
+              <a:srgbClr val="DCE6F5"/>
             </a:solidFill>
             <a:prstDash val="solid"/>
           </a:ln>
           <a:effectLst>
-            <a:outerShdw blurRad="114300" dist="38100" dir="5400000" algn="bl" rotWithShape="0">
-              <a:srgbClr val="012932">
-                <a:alpha val="16000"/>
+            <a:outerShdw sx="100000" sy="100000" kx="0" ky="0" algn="bl" rotWithShape="0" blurRad="114300" dist="38100" dir="5400000">
+              <a:srgbClr val="0A1E42">
+                <a:alpha val="18000"/>
               </a:srgbClr>
             </a:outerShdw>
           </a:effectLst>
         </p:spPr>
-        <p:txBody>
-          <a:bodyPr/>
-          <a:lstStyle/>
-          <a:p>
-            <a:endParaRPr lang="en-US"/>
-          </a:p>
-        </p:txBody>
       </p:sp>
       <p:sp>
         <p:nvSpPr>
@@ -9152,13 +9044,13 @@
           <a:bodyPr wrap="square" lIns="0" tIns="0" rIns="0" bIns="0" rtlCol="0" anchor="t"/>
           <a:lstStyle/>
           <a:p>
-            <a:pPr marL="0" indent="0">
+            <a:pPr indent="0" marL="0">
               <a:buNone/>
             </a:pPr>
             <a:r>
               <a:rPr lang="en-US" sz="1800" b="1" dirty="0">
                 <a:solidFill>
-                  <a:srgbClr val="012932"/>
+                  <a:srgbClr val="0A1E42"/>
                 </a:solidFill>
                 <a:latin typeface="Cambria" pitchFamily="34" charset="0"/>
                 <a:ea typeface="Cambria" pitchFamily="34" charset="-122"/>
@@ -9191,13 +9083,13 @@
           <a:bodyPr wrap="square" lIns="0" tIns="0" rIns="0" bIns="0" rtlCol="0" anchor="t"/>
           <a:lstStyle/>
           <a:p>
-            <a:pPr marL="0" indent="0">
+            <a:pPr indent="0" marL="0">
               <a:buNone/>
             </a:pPr>
             <a:r>
               <a:rPr lang="en-US" sz="1350" dirty="0">
                 <a:solidFill>
-                  <a:srgbClr val="11333A"/>
+                  <a:srgbClr val="13223F"/>
                 </a:solidFill>
                 <a:latin typeface="Calibri" pitchFamily="34" charset="0"/>
                 <a:ea typeface="Calibri" pitchFamily="34" charset="-122"/>
@@ -9226,22 +9118,15 @@
             </a:avLst>
           </a:prstGeom>
           <a:solidFill>
-            <a:srgbClr val="EAF7FB"/>
+            <a:srgbClr val="EEF3FC"/>
           </a:solidFill>
           <a:ln w="12700">
             <a:solidFill>
-              <a:srgbClr val="037B96"/>
+              <a:srgbClr val="1D4ED8"/>
             </a:solidFill>
             <a:prstDash val="solid"/>
           </a:ln>
         </p:spPr>
-        <p:txBody>
-          <a:bodyPr/>
-          <a:lstStyle/>
-          <a:p>
-            <a:endParaRPr lang="en-US"/>
-          </a:p>
-        </p:txBody>
       </p:sp>
       <p:sp>
         <p:nvSpPr>
@@ -9264,13 +9149,13 @@
           <a:bodyPr wrap="square" lIns="0" tIns="0" rIns="0" bIns="0" rtlCol="0" anchor="ctr"/>
           <a:lstStyle/>
           <a:p>
-            <a:pPr marL="0" indent="0" algn="ctr">
+            <a:pPr algn="ctr" indent="0" marL="0">
               <a:buNone/>
             </a:pPr>
             <a:r>
               <a:rPr lang="en-US" sz="1200" b="1" dirty="0">
                 <a:solidFill>
-                  <a:srgbClr val="037B96"/>
+                  <a:srgbClr val="1D4ED8"/>
                 </a:solidFill>
                 <a:latin typeface="Calibri" pitchFamily="34" charset="0"/>
                 <a:ea typeface="Calibri" pitchFamily="34" charset="-122"/>
@@ -9298,7 +9183,6 @@
         <a:solidFill>
           <a:srgbClr val="FFFFFF"/>
         </a:solidFill>
-        <a:effectLst/>
       </p:bgPr>
     </p:bg>
     <p:spTree>
@@ -9336,13 +9220,13 @@
           <a:bodyPr wrap="square" lIns="0" tIns="0" rIns="0" bIns="0" rtlCol="0" anchor="ctr"/>
           <a:lstStyle/>
           <a:p>
-            <a:pPr marL="0" indent="0" algn="l">
+            <a:pPr algn="l" indent="0" marL="0">
               <a:buNone/>
             </a:pPr>
             <a:r>
               <a:rPr lang="en-US" sz="3100" b="1" dirty="0">
                 <a:solidFill>
-                  <a:srgbClr val="012932"/>
+                  <a:srgbClr val="0A1E42"/>
                 </a:solidFill>
                 <a:latin typeface="Cambria" pitchFamily="34" charset="0"/>
                 <a:ea typeface="Cambria" pitchFamily="34" charset="-122"/>
@@ -9375,7 +9259,7 @@
           <a:bodyPr wrap="square" lIns="0" tIns="0" rIns="0" bIns="0" rtlCol="0" anchor="t"/>
           <a:lstStyle/>
           <a:p>
-            <a:pPr marL="0" indent="0">
+            <a:pPr indent="0" marL="0">
               <a:lnSpc>
                 <a:spcPct val="112000"/>
               </a:lnSpc>
@@ -9384,7 +9268,7 @@
             <a:r>
               <a:rPr lang="en-US" sz="1550" dirty="0">
                 <a:solidFill>
-                  <a:srgbClr val="11333A"/>
+                  <a:srgbClr val="13223F"/>
                 </a:solidFill>
                 <a:latin typeface="Calibri" pitchFamily="34" charset="0"/>
                 <a:ea typeface="Calibri" pitchFamily="34" charset="-122"/>
@@ -9413,22 +9297,15 @@
             </a:avLst>
           </a:prstGeom>
           <a:solidFill>
-            <a:srgbClr val="012932"/>
+            <a:srgbClr val="0A1E42"/>
           </a:solidFill>
           <a:ln w="12700">
             <a:solidFill>
-              <a:srgbClr val="D6E9EF"/>
+              <a:srgbClr val="DCE6F5"/>
             </a:solidFill>
             <a:prstDash val="solid"/>
           </a:ln>
         </p:spPr>
-        <p:txBody>
-          <a:bodyPr/>
-          <a:lstStyle/>
-          <a:p>
-            <a:endParaRPr lang="en-US"/>
-          </a:p>
-        </p:txBody>
       </p:sp>
       <p:sp>
         <p:nvSpPr>
@@ -9451,7 +9328,7 @@
           <a:bodyPr wrap="square" lIns="0" tIns="0" rIns="0" bIns="0" rtlCol="0" anchor="ctr"/>
           <a:lstStyle/>
           <a:p>
-            <a:pPr marL="0" indent="0">
+            <a:pPr indent="0" marL="0">
               <a:buNone/>
             </a:pPr>
             <a:r>
@@ -9463,7 +9340,7 @@
                 <a:ea typeface="Cambria" pitchFamily="34" charset="-122"/>
                 <a:cs typeface="Cambria" pitchFamily="34" charset="-120"/>
               </a:rPr>
-              <a:t>Navy</a:t>
+              <a:t>Navy sâu</a:t>
             </a:r>
             <a:endParaRPr lang="en-US" sz="2000" dirty="0"/>
           </a:p>
@@ -9490,7 +9367,7 @@
           <a:bodyPr wrap="square" lIns="0" tIns="0" rIns="0" bIns="0" rtlCol="0" anchor="ctr"/>
           <a:lstStyle/>
           <a:p>
-            <a:pPr marL="0" indent="0">
+            <a:pPr indent="0" marL="0">
               <a:buNone/>
             </a:pPr>
             <a:r>
@@ -9502,7 +9379,7 @@
                 <a:ea typeface="Calibri" pitchFamily="34" charset="-122"/>
                 <a:cs typeface="Calibri" pitchFamily="34" charset="-120"/>
               </a:rPr>
-              <a:t>#012932</a:t>
+              <a:t>#0A1E42</a:t>
             </a:r>
             <a:endParaRPr lang="en-US" sz="1300" dirty="0"/>
           </a:p>
@@ -9529,7 +9406,7 @@
           <a:bodyPr wrap="square" lIns="0" tIns="0" rIns="0" bIns="0" rtlCol="0" anchor="t"/>
           <a:lstStyle/>
           <a:p>
-            <a:pPr marL="0" indent="0" algn="l">
+            <a:pPr algn="l" indent="0" marL="0">
               <a:lnSpc>
                 <a:spcPct val="105000"/>
               </a:lnSpc>
@@ -9538,7 +9415,7 @@
             <a:r>
               <a:rPr lang="en-US" sz="1250" dirty="0">
                 <a:solidFill>
-                  <a:srgbClr val="11333A"/>
+                  <a:srgbClr val="13223F"/>
                 </a:solidFill>
                 <a:latin typeface="Calibri" pitchFamily="34" charset="0"/>
                 <a:ea typeface="Calibri" pitchFamily="34" charset="-122"/>
@@ -9567,22 +9444,15 @@
             </a:avLst>
           </a:prstGeom>
           <a:solidFill>
-            <a:srgbClr val="037B96"/>
+            <a:srgbClr val="1D4ED8"/>
           </a:solidFill>
           <a:ln w="12700">
             <a:solidFill>
-              <a:srgbClr val="D6E9EF"/>
+              <a:srgbClr val="DCE6F5"/>
             </a:solidFill>
             <a:prstDash val="solid"/>
           </a:ln>
         </p:spPr>
-        <p:txBody>
-          <a:bodyPr/>
-          <a:lstStyle/>
-          <a:p>
-            <a:endParaRPr lang="en-US"/>
-          </a:p>
-        </p:txBody>
       </p:sp>
       <p:sp>
         <p:nvSpPr>
@@ -9605,7 +9475,7 @@
           <a:bodyPr wrap="square" lIns="0" tIns="0" rIns="0" bIns="0" rtlCol="0" anchor="ctr"/>
           <a:lstStyle/>
           <a:p>
-            <a:pPr marL="0" indent="0">
+            <a:pPr indent="0" marL="0">
               <a:buNone/>
             </a:pPr>
             <a:r>
@@ -9617,7 +9487,7 @@
                 <a:ea typeface="Cambria" pitchFamily="34" charset="-122"/>
                 <a:cs typeface="Cambria" pitchFamily="34" charset="-120"/>
               </a:rPr>
-              <a:t>Cobalt</a:t>
+              <a:t>Xanh chủ đạo</a:t>
             </a:r>
             <a:endParaRPr lang="en-US" sz="2000" dirty="0"/>
           </a:p>
@@ -9644,7 +9514,7 @@
           <a:bodyPr wrap="square" lIns="0" tIns="0" rIns="0" bIns="0" rtlCol="0" anchor="ctr"/>
           <a:lstStyle/>
           <a:p>
-            <a:pPr marL="0" indent="0">
+            <a:pPr indent="0" marL="0">
               <a:buNone/>
             </a:pPr>
             <a:r>
@@ -9656,7 +9526,7 @@
                 <a:ea typeface="Calibri" pitchFamily="34" charset="-122"/>
                 <a:cs typeface="Calibri" pitchFamily="34" charset="-120"/>
               </a:rPr>
-              <a:t>#037B96</a:t>
+              <a:t>#1D4ED8</a:t>
             </a:r>
             <a:endParaRPr lang="en-US" sz="1300" dirty="0"/>
           </a:p>
@@ -9683,7 +9553,7 @@
           <a:bodyPr wrap="square" lIns="0" tIns="0" rIns="0" bIns="0" rtlCol="0" anchor="t"/>
           <a:lstStyle/>
           <a:p>
-            <a:pPr marL="0" indent="0" algn="l">
+            <a:pPr algn="l" indent="0" marL="0">
               <a:lnSpc>
                 <a:spcPct val="105000"/>
               </a:lnSpc>
@@ -9692,7 +9562,7 @@
             <a:r>
               <a:rPr lang="en-US" sz="1250" dirty="0">
                 <a:solidFill>
-                  <a:srgbClr val="11333A"/>
+                  <a:srgbClr val="13223F"/>
                 </a:solidFill>
                 <a:latin typeface="Calibri" pitchFamily="34" charset="0"/>
                 <a:ea typeface="Calibri" pitchFamily="34" charset="-122"/>
@@ -9721,22 +9591,15 @@
             </a:avLst>
           </a:prstGeom>
           <a:solidFill>
-            <a:srgbClr val="82E6FD"/>
+            <a:srgbClr val="8FB4FF"/>
           </a:solidFill>
           <a:ln w="12700">
             <a:solidFill>
-              <a:srgbClr val="D6E9EF"/>
+              <a:srgbClr val="DCE6F5"/>
             </a:solidFill>
             <a:prstDash val="solid"/>
           </a:ln>
         </p:spPr>
-        <p:txBody>
-          <a:bodyPr/>
-          <a:lstStyle/>
-          <a:p>
-            <a:endParaRPr lang="en-US"/>
-          </a:p>
-        </p:txBody>
       </p:sp>
       <p:sp>
         <p:nvSpPr>
@@ -9759,13 +9622,13 @@
           <a:bodyPr wrap="square" lIns="0" tIns="0" rIns="0" bIns="0" rtlCol="0" anchor="ctr"/>
           <a:lstStyle/>
           <a:p>
-            <a:pPr marL="0" indent="0">
+            <a:pPr indent="0" marL="0">
               <a:buNone/>
             </a:pPr>
             <a:r>
               <a:rPr lang="en-US" sz="2000" b="1" dirty="0">
                 <a:solidFill>
-                  <a:srgbClr val="012932"/>
+                  <a:srgbClr val="0A1E42"/>
                 </a:solidFill>
                 <a:latin typeface="Cambria" pitchFamily="34" charset="0"/>
                 <a:ea typeface="Cambria" pitchFamily="34" charset="-122"/>
@@ -9798,19 +9661,19 @@
           <a:bodyPr wrap="square" lIns="0" tIns="0" rIns="0" bIns="0" rtlCol="0" anchor="ctr"/>
           <a:lstStyle/>
           <a:p>
-            <a:pPr marL="0" indent="0">
+            <a:pPr indent="0" marL="0">
               <a:buNone/>
             </a:pPr>
             <a:r>
               <a:rPr lang="en-US" sz="1300" dirty="0">
                 <a:solidFill>
-                  <a:srgbClr val="012932"/>
+                  <a:srgbClr val="0A1E42"/>
                 </a:solidFill>
                 <a:latin typeface="Calibri" pitchFamily="34" charset="0"/>
                 <a:ea typeface="Calibri" pitchFamily="34" charset="-122"/>
                 <a:cs typeface="Calibri" pitchFamily="34" charset="-120"/>
               </a:rPr>
-              <a:t>#82E6FD</a:t>
+              <a:t>#8FB4FF</a:t>
             </a:r>
             <a:endParaRPr lang="en-US" sz="1300" dirty="0"/>
           </a:p>
@@ -9837,7 +9700,7 @@
           <a:bodyPr wrap="square" lIns="0" tIns="0" rIns="0" bIns="0" rtlCol="0" anchor="t"/>
           <a:lstStyle/>
           <a:p>
-            <a:pPr marL="0" indent="0" algn="l">
+            <a:pPr algn="l" indent="0" marL="0">
               <a:lnSpc>
                 <a:spcPct val="105000"/>
               </a:lnSpc>
@@ -9846,7 +9709,7 @@
             <a:r>
               <a:rPr lang="en-US" sz="1250" dirty="0">
                 <a:solidFill>
-                  <a:srgbClr val="11333A"/>
+                  <a:srgbClr val="13223F"/>
                 </a:solidFill>
                 <a:latin typeface="Calibri" pitchFamily="34" charset="0"/>
                 <a:ea typeface="Calibri" pitchFamily="34" charset="-122"/>
@@ -9879,18 +9742,11 @@
           </a:solidFill>
           <a:ln w="12700">
             <a:solidFill>
-              <a:srgbClr val="D6E9EF"/>
+              <a:srgbClr val="DCE6F5"/>
             </a:solidFill>
             <a:prstDash val="solid"/>
           </a:ln>
         </p:spPr>
-        <p:txBody>
-          <a:bodyPr/>
-          <a:lstStyle/>
-          <a:p>
-            <a:endParaRPr lang="en-US"/>
-          </a:p>
-        </p:txBody>
       </p:sp>
       <p:sp>
         <p:nvSpPr>
@@ -9913,7 +9769,7 @@
           <a:bodyPr wrap="square" lIns="0" tIns="0" rIns="0" bIns="0" rtlCol="0" anchor="ctr"/>
           <a:lstStyle/>
           <a:p>
-            <a:pPr marL="0" indent="0">
+            <a:pPr indent="0" marL="0">
               <a:buNone/>
             </a:pPr>
             <a:r>
@@ -9952,7 +9808,7 @@
           <a:bodyPr wrap="square" lIns="0" tIns="0" rIns="0" bIns="0" rtlCol="0" anchor="ctr"/>
           <a:lstStyle/>
           <a:p>
-            <a:pPr marL="0" indent="0">
+            <a:pPr indent="0" marL="0">
               <a:buNone/>
             </a:pPr>
             <a:r>
@@ -9991,7 +9847,7 @@
           <a:bodyPr wrap="square" lIns="0" tIns="0" rIns="0" bIns="0" rtlCol="0" anchor="t"/>
           <a:lstStyle/>
           <a:p>
-            <a:pPr marL="0" indent="0" algn="l">
+            <a:pPr algn="l" indent="0" marL="0">
               <a:lnSpc>
                 <a:spcPct val="105000"/>
               </a:lnSpc>
@@ -10000,7 +9856,7 @@
             <a:r>
               <a:rPr lang="en-US" sz="1250" dirty="0">
                 <a:solidFill>
-                  <a:srgbClr val="11333A"/>
+                  <a:srgbClr val="13223F"/>
                 </a:solidFill>
                 <a:latin typeface="Calibri" pitchFamily="34" charset="0"/>
                 <a:ea typeface="Calibri" pitchFamily="34" charset="-122"/>
@@ -10033,13 +9889,13 @@
           <a:bodyPr wrap="square" lIns="0" tIns="0" rIns="0" bIns="0" rtlCol="0" anchor="ctr"/>
           <a:lstStyle/>
           <a:p>
-            <a:pPr marL="0" indent="0">
+            <a:pPr indent="0" marL="0">
               <a:buNone/>
             </a:pPr>
             <a:r>
               <a:rPr lang="en-US" sz="1400" b="1" i="1" dirty="0">
                 <a:solidFill>
-                  <a:srgbClr val="012932"/>
+                  <a:srgbClr val="0A1E42"/>
                 </a:solidFill>
                 <a:latin typeface="Calibri" pitchFamily="34" charset="0"/>
                 <a:ea typeface="Calibri" pitchFamily="34" charset="-122"/>
@@ -10352,319 +10208,4 @@
     </a:ext>
   </a:extLst>
 </a:theme>
-</file>
-
-<file path=ppt/theme/theme2.xml><?xml version="1.0" encoding="utf-8"?>
-<a:theme xmlns:a="http://schemas.openxmlformats.org/drawingml/2006/main" name="Office Theme">
-  <a:themeElements>
-    <a:clrScheme name="Office">
-      <a:dk1>
-        <a:sysClr val="windowText" lastClr="000000"/>
-      </a:dk1>
-      <a:lt1>
-        <a:sysClr val="window" lastClr="FFFFFF"/>
-      </a:lt1>
-      <a:dk2>
-        <a:srgbClr val="0E2841"/>
-      </a:dk2>
-      <a:lt2>
-        <a:srgbClr val="E8E8E8"/>
-      </a:lt2>
-      <a:accent1>
-        <a:srgbClr val="156082"/>
-      </a:accent1>
-      <a:accent2>
-        <a:srgbClr val="E97132"/>
-      </a:accent2>
-      <a:accent3>
-        <a:srgbClr val="196B24"/>
-      </a:accent3>
-      <a:accent4>
-        <a:srgbClr val="0F9ED5"/>
-      </a:accent4>
-      <a:accent5>
-        <a:srgbClr val="A02B93"/>
-      </a:accent5>
-      <a:accent6>
-        <a:srgbClr val="4EA72E"/>
-      </a:accent6>
-      <a:hlink>
-        <a:srgbClr val="467886"/>
-      </a:hlink>
-      <a:folHlink>
-        <a:srgbClr val="96607D"/>
-      </a:folHlink>
-    </a:clrScheme>
-    <a:fontScheme name="Office">
-      <a:majorFont>
-        <a:latin typeface="Aptos Display" panose="02110004020202020204"/>
-        <a:ea typeface=""/>
-        <a:cs typeface=""/>
-        <a:font script="Jpan" typeface="游ゴシック Light"/>
-        <a:font script="Hang" typeface="맑은 고딕"/>
-        <a:font script="Hans" typeface="等线 Light"/>
-        <a:font script="Hant" typeface="新細明體"/>
-        <a:font script="Arab" typeface="Times New Roman"/>
-        <a:font script="Hebr" typeface="Times New Roman"/>
-        <a:font script="Thai" typeface="Angsana New"/>
-        <a:font script="Ethi" typeface="Nyala"/>
-        <a:font script="Beng" typeface="Vrinda"/>
-        <a:font script="Gujr" typeface="Shruti"/>
-        <a:font script="Khmr" typeface="MoolBoran"/>
-        <a:font script="Knda" typeface="Tunga"/>
-        <a:font script="Guru" typeface="Raavi"/>
-        <a:font script="Cans" typeface="Euphemia"/>
-        <a:font script="Cher" typeface="Plantagenet Cherokee"/>
-        <a:font script="Yiii" typeface="Microsoft Yi Baiti"/>
-        <a:font script="Tibt" typeface="Microsoft Himalaya"/>
-        <a:font script="Thaa" typeface="MV Boli"/>
-        <a:font script="Deva" typeface="Mangal"/>
-        <a:font script="Telu" typeface="Gautami"/>
-        <a:font script="Taml" typeface="Latha"/>
-        <a:font script="Syrc" typeface="Estrangelo Edessa"/>
-        <a:font script="Orya" typeface="Kalinga"/>
-        <a:font script="Mlym" typeface="Kartika"/>
-        <a:font script="Laoo" typeface="DokChampa"/>
-        <a:font script="Sinh" typeface="Iskoola Pota"/>
-        <a:font script="Mong" typeface="Mongolian Baiti"/>
-        <a:font script="Viet" typeface="Times New Roman"/>
-        <a:font script="Uigh" typeface="Microsoft Uighur"/>
-        <a:font script="Geor" typeface="Sylfaen"/>
-        <a:font script="Armn" typeface="Arial"/>
-        <a:font script="Bugi" typeface="Leelawadee UI"/>
-        <a:font script="Bopo" typeface="Microsoft JhengHei"/>
-        <a:font script="Java" typeface="Javanese Text"/>
-        <a:font script="Lisu" typeface="Segoe UI"/>
-        <a:font script="Mymr" typeface="Myanmar Text"/>
-        <a:font script="Nkoo" typeface="Ebrima"/>
-        <a:font script="Olck" typeface="Nirmala UI"/>
-        <a:font script="Osma" typeface="Ebrima"/>
-        <a:font script="Phag" typeface="Phagspa"/>
-        <a:font script="Syrn" typeface="Estrangelo Edessa"/>
-        <a:font script="Syrj" typeface="Estrangelo Edessa"/>
-        <a:font script="Syre" typeface="Estrangelo Edessa"/>
-        <a:font script="Sora" typeface="Nirmala UI"/>
-        <a:font script="Tale" typeface="Microsoft Tai Le"/>
-        <a:font script="Talu" typeface="Microsoft New Tai Lue"/>
-        <a:font script="Tfng" typeface="Ebrima"/>
-      </a:majorFont>
-      <a:minorFont>
-        <a:latin typeface="Aptos" panose="02110004020202020204"/>
-        <a:ea typeface=""/>
-        <a:cs typeface=""/>
-        <a:font script="Jpan" typeface="游ゴシック"/>
-        <a:font script="Hang" typeface="맑은 고딕"/>
-        <a:font script="Hans" typeface="等线"/>
-        <a:font script="Hant" typeface="新細明體"/>
-        <a:font script="Arab" typeface="Arial"/>
-        <a:font script="Hebr" typeface="Arial"/>
-        <a:font script="Thai" typeface="Cordia New"/>
-        <a:font script="Ethi" typeface="Nyala"/>
-        <a:font script="Beng" typeface="Vrinda"/>
-        <a:font script="Gujr" typeface="Shruti"/>
-        <a:font script="Khmr" typeface="DaunPenh"/>
-        <a:font script="Knda" typeface="Tunga"/>
-        <a:font script="Guru" typeface="Raavi"/>
-        <a:font script="Cans" typeface="Euphemia"/>
-        <a:font script="Cher" typeface="Plantagenet Cherokee"/>
-        <a:font script="Yiii" typeface="Microsoft Yi Baiti"/>
-        <a:font script="Tibt" typeface="Microsoft Himalaya"/>
-        <a:font script="Thaa" typeface="MV Boli"/>
-        <a:font script="Deva" typeface="Mangal"/>
-        <a:font script="Telu" typeface="Gautami"/>
-        <a:font script="Taml" typeface="Latha"/>
-        <a:font script="Syrc" typeface="Estrangelo Edessa"/>
-        <a:font script="Orya" typeface="Kalinga"/>
-        <a:font script="Mlym" typeface="Kartika"/>
-        <a:font script="Laoo" typeface="DokChampa"/>
-        <a:font script="Sinh" typeface="Iskoola Pota"/>
-        <a:font script="Mong" typeface="Mongolian Baiti"/>
-        <a:font script="Viet" typeface="Arial"/>
-        <a:font script="Uigh" typeface="Microsoft Uighur"/>
-        <a:font script="Geor" typeface="Sylfaen"/>
-        <a:font script="Armn" typeface="Arial"/>
-        <a:font script="Bugi" typeface="Leelawadee UI"/>
-        <a:font script="Bopo" typeface="Microsoft JhengHei"/>
-        <a:font script="Java" typeface="Javanese Text"/>
-        <a:font script="Lisu" typeface="Segoe UI"/>
-        <a:font script="Mymr" typeface="Myanmar Text"/>
-        <a:font script="Nkoo" typeface="Ebrima"/>
-        <a:font script="Olck" typeface="Nirmala UI"/>
-        <a:font script="Osma" typeface="Ebrima"/>
-        <a:font script="Phag" typeface="Phagspa"/>
-        <a:font script="Syrn" typeface="Estrangelo Edessa"/>
-        <a:font script="Syrj" typeface="Estrangelo Edessa"/>
-        <a:font script="Syre" typeface="Estrangelo Edessa"/>
-        <a:font script="Sora" typeface="Nirmala UI"/>
-        <a:font script="Tale" typeface="Microsoft Tai Le"/>
-        <a:font script="Talu" typeface="Microsoft New Tai Lue"/>
-        <a:font script="Tfng" typeface="Ebrima"/>
-      </a:minorFont>
-    </a:fontScheme>
-    <a:fmtScheme name="Office">
-      <a:fillStyleLst>
-        <a:solidFill>
-          <a:schemeClr val="phClr"/>
-        </a:solidFill>
-        <a:gradFill rotWithShape="1">
-          <a:gsLst>
-            <a:gs pos="0">
-              <a:schemeClr val="phClr">
-                <a:lumMod val="110000"/>
-                <a:satMod val="105000"/>
-                <a:tint val="67000"/>
-              </a:schemeClr>
-            </a:gs>
-            <a:gs pos="50000">
-              <a:schemeClr val="phClr">
-                <a:lumMod val="105000"/>
-                <a:satMod val="103000"/>
-                <a:tint val="73000"/>
-              </a:schemeClr>
-            </a:gs>
-            <a:gs pos="100000">
-              <a:schemeClr val="phClr">
-                <a:lumMod val="105000"/>
-                <a:satMod val="109000"/>
-                <a:tint val="81000"/>
-              </a:schemeClr>
-            </a:gs>
-          </a:gsLst>
-          <a:lin ang="5400000" scaled="0"/>
-        </a:gradFill>
-        <a:gradFill rotWithShape="1">
-          <a:gsLst>
-            <a:gs pos="0">
-              <a:schemeClr val="phClr">
-                <a:satMod val="103000"/>
-                <a:lumMod val="102000"/>
-                <a:tint val="94000"/>
-              </a:schemeClr>
-            </a:gs>
-            <a:gs pos="50000">
-              <a:schemeClr val="phClr">
-                <a:satMod val="110000"/>
-                <a:lumMod val="100000"/>
-                <a:shade val="100000"/>
-              </a:schemeClr>
-            </a:gs>
-            <a:gs pos="100000">
-              <a:schemeClr val="phClr">
-                <a:lumMod val="99000"/>
-                <a:satMod val="120000"/>
-                <a:shade val="78000"/>
-              </a:schemeClr>
-            </a:gs>
-          </a:gsLst>
-          <a:lin ang="5400000" scaled="0"/>
-        </a:gradFill>
-      </a:fillStyleLst>
-      <a:lnStyleLst>
-        <a:ln w="12700" cap="flat" cmpd="sng" algn="ctr">
-          <a:solidFill>
-            <a:schemeClr val="phClr"/>
-          </a:solidFill>
-          <a:prstDash val="solid"/>
-          <a:miter lim="800000"/>
-        </a:ln>
-        <a:ln w="19050" cap="flat" cmpd="sng" algn="ctr">
-          <a:solidFill>
-            <a:schemeClr val="phClr"/>
-          </a:solidFill>
-          <a:prstDash val="solid"/>
-          <a:miter lim="800000"/>
-        </a:ln>
-        <a:ln w="25400" cap="flat" cmpd="sng" algn="ctr">
-          <a:solidFill>
-            <a:schemeClr val="phClr"/>
-          </a:solidFill>
-          <a:prstDash val="solid"/>
-          <a:miter lim="800000"/>
-        </a:ln>
-      </a:lnStyleLst>
-      <a:effectStyleLst>
-        <a:effectStyle>
-          <a:effectLst/>
-        </a:effectStyle>
-        <a:effectStyle>
-          <a:effectLst/>
-        </a:effectStyle>
-        <a:effectStyle>
-          <a:effectLst>
-            <a:outerShdw blurRad="57150" dist="19050" dir="5400000" algn="ctr" rotWithShape="0">
-              <a:srgbClr val="000000">
-                <a:alpha val="63000"/>
-              </a:srgbClr>
-            </a:outerShdw>
-          </a:effectLst>
-        </a:effectStyle>
-      </a:effectStyleLst>
-      <a:bgFillStyleLst>
-        <a:solidFill>
-          <a:schemeClr val="phClr"/>
-        </a:solidFill>
-        <a:solidFill>
-          <a:schemeClr val="phClr">
-            <a:tint val="95000"/>
-            <a:satMod val="170000"/>
-          </a:schemeClr>
-        </a:solidFill>
-        <a:gradFill rotWithShape="1">
-          <a:gsLst>
-            <a:gs pos="0">
-              <a:schemeClr val="phClr">
-                <a:tint val="93000"/>
-                <a:satMod val="150000"/>
-                <a:shade val="98000"/>
-                <a:lumMod val="102000"/>
-              </a:schemeClr>
-            </a:gs>
-            <a:gs pos="50000">
-              <a:schemeClr val="phClr">
-                <a:tint val="98000"/>
-                <a:satMod val="130000"/>
-                <a:shade val="90000"/>
-                <a:lumMod val="103000"/>
-              </a:schemeClr>
-            </a:gs>
-            <a:gs pos="100000">
-              <a:schemeClr val="phClr">
-                <a:shade val="63000"/>
-                <a:satMod val="120000"/>
-              </a:schemeClr>
-            </a:gs>
-          </a:gsLst>
-          <a:lin ang="5400000" scaled="0"/>
-        </a:gradFill>
-      </a:bgFillStyleLst>
-    </a:fmtScheme>
-  </a:themeElements>
-  <a:objectDefaults>
-    <a:lnDef>
-      <a:spPr/>
-      <a:bodyPr/>
-      <a:lstStyle/>
-      <a:style>
-        <a:lnRef idx="2">
-          <a:schemeClr val="accent1"/>
-        </a:lnRef>
-        <a:fillRef idx="0">
-          <a:schemeClr val="accent1"/>
-        </a:fillRef>
-        <a:effectRef idx="1">
-          <a:schemeClr val="accent1"/>
-        </a:effectRef>
-        <a:fontRef idx="minor">
-          <a:schemeClr val="tx1"/>
-        </a:fontRef>
-      </a:style>
-    </a:lnDef>
-  </a:objectDefaults>
-  <a:extraClrSchemeLst/>
-  <a:extLst>
-    <a:ext uri="{05A4C25C-085E-4340-85A3-A5531E510DB2}">
-      <thm15:themeFamily xmlns:thm15="http://schemas.microsoft.com/office/thememl/2012/main" name="Office Theme" id="{2E142A2C-CD16-42D6-873A-C26D2A0506FA}" vid="{1BDDFF52-6CD6-40A5-AB3C-68EB2F1E4D0A}"/>
-    </a:ext>
-  </a:extLst>
-</a:theme>
 </file>